--- a/Plantillas_pptx/IPN_Colaboradores_Educación_automatizada.pptx
+++ b/Plantillas_pptx/IPN_Colaboradores_Educación_automatizada.pptx
@@ -793,28 +793,34 @@
                 <c:formatCode>0.0%</c:formatCode>
                 <c:ptCount val="10"/>
                 <c:pt idx="0">
-                  <c:v>6.3E-2</c:v>
+                  <c:v>0.33329999999999999</c:v>
                 </c:pt>
                 <c:pt idx="1">
-                  <c:v>6.3E-2</c:v>
+                  <c:v>0.33329999999999999</c:v>
                 </c:pt>
                 <c:pt idx="2">
-                  <c:v>4.8000000000000001E-2</c:v>
+                  <c:v>0.33329999999999999</c:v>
                 </c:pt>
                 <c:pt idx="3">
-                  <c:v>8.5999999999999993E-2</c:v>
+                  <c:v>0.33329999999999999</c:v>
                 </c:pt>
                 <c:pt idx="4">
-                  <c:v>7.0000000000000007E-2</c:v>
+                  <c:v>0.33329999999999999</c:v>
                 </c:pt>
                 <c:pt idx="5">
-                  <c:v>3.3000000000000002E-2</c:v>
+                  <c:v>0.33329999999999999</c:v>
                 </c:pt>
                 <c:pt idx="6">
-                  <c:v>9.8000000000000004E-2</c:v>
+                  <c:v>0.33329999999999999</c:v>
                 </c:pt>
                 <c:pt idx="7">
-                  <c:v>5.8999999999999997E-2</c:v>
+                  <c:v>0.33329999999999999</c:v>
+                </c:pt>
+                <c:pt idx="8">
+                  <c:v>0.33329999999999999</c:v>
+                </c:pt>
+                <c:pt idx="9">
+                  <c:v>0.33329999999999999</c:v>
                 </c:pt>
               </c:numCache>
             </c:numRef>
@@ -1236,31 +1242,34 @@
                 <c:formatCode>0.0%</c:formatCode>
                 <c:ptCount val="10"/>
                 <c:pt idx="0">
-                  <c:v>0.17199999999999999</c:v>
+                  <c:v>0.33329999999999999</c:v>
                 </c:pt>
                 <c:pt idx="1">
-                  <c:v>0.159</c:v>
+                  <c:v>0.33329999999999999</c:v>
                 </c:pt>
                 <c:pt idx="2">
-                  <c:v>0.215</c:v>
+                  <c:v>0.33329999999999999</c:v>
                 </c:pt>
                 <c:pt idx="3">
-                  <c:v>0.23400000000000001</c:v>
+                  <c:v>0.33329999999999999</c:v>
                 </c:pt>
                 <c:pt idx="4">
-                  <c:v>0.21199999999999999</c:v>
+                  <c:v>0.33329999999999999</c:v>
                 </c:pt>
                 <c:pt idx="5">
-                  <c:v>0.17199999999999999</c:v>
+                  <c:v>0.33329999999999999</c:v>
                 </c:pt>
                 <c:pt idx="6">
-                  <c:v>0.29899999999999999</c:v>
+                  <c:v>0.33329999999999999</c:v>
                 </c:pt>
                 <c:pt idx="7">
-                  <c:v>0.21099999999999999</c:v>
+                  <c:v>0.33329999999999999</c:v>
                 </c:pt>
                 <c:pt idx="8">
-                  <c:v>0.26700000000000002</c:v>
+                  <c:v>0.33329999999999999</c:v>
+                </c:pt>
+                <c:pt idx="9">
+                  <c:v>0.33329999999999999</c:v>
                 </c:pt>
               </c:numCache>
             </c:numRef>
@@ -1570,34 +1579,34 @@
                 <c:formatCode>0.0%</c:formatCode>
                 <c:ptCount val="10"/>
                 <c:pt idx="0">
-                  <c:v>0.76500000000000001</c:v>
+                  <c:v>0.33329999999999999</c:v>
                 </c:pt>
                 <c:pt idx="1">
-                  <c:v>0.77800000000000002</c:v>
+                  <c:v>0.33329999999999999</c:v>
                 </c:pt>
                 <c:pt idx="2">
-                  <c:v>0.73599999999999999</c:v>
+                  <c:v>0.33329999999999999</c:v>
                 </c:pt>
                 <c:pt idx="3">
-                  <c:v>0.68</c:v>
+                  <c:v>0.33329999999999999</c:v>
                 </c:pt>
                 <c:pt idx="4">
-                  <c:v>0.71799999999999997</c:v>
+                  <c:v>0.33329999999999999</c:v>
                 </c:pt>
                 <c:pt idx="5">
-                  <c:v>0.79600000000000004</c:v>
+                  <c:v>0.33329999999999999</c:v>
                 </c:pt>
                 <c:pt idx="6">
-                  <c:v>0.60199999999999998</c:v>
+                  <c:v>0.33329999999999999</c:v>
                 </c:pt>
                 <c:pt idx="7">
-                  <c:v>0.73</c:v>
+                  <c:v>0.33329999999999999</c:v>
                 </c:pt>
                 <c:pt idx="8">
-                  <c:v>0.73299999999999998</c:v>
+                  <c:v>0.33329999999999999</c:v>
                 </c:pt>
                 <c:pt idx="9">
-                  <c:v>1</c:v>
+                  <c:v>0.33329999999999999</c:v>
                 </c:pt>
               </c:numCache>
             </c:numRef>
@@ -1797,222 +1806,21 @@
             </c:extLst>
           </c:dPt>
           <c:dLbls>
-            <c:dLbl>
-              <c:idx val="0"/>
-              <c:layout>
-                <c:manualLayout>
-                  <c:x val="1.4650624016619434E-2"/>
-                  <c:y val="2.9314358696761394E-2"/>
-                </c:manualLayout>
-              </c:layout>
-              <c:dLblPos val="ctr"/>
-              <c:showLegendKey val="0"/>
-              <c:showVal val="1"/>
-              <c:showCatName val="0"/>
-              <c:showSerName val="0"/>
-              <c:showPercent val="0"/>
-              <c:showBubbleSize val="0"/>
-              <c:extLst>
-                <c:ext xmlns:c15="http://schemas.microsoft.com/office/drawing/2012/chart" uri="{CE6537A1-D6FC-4f65-9D91-7224C49458BB}"/>
-                <c:ext xmlns:c16="http://schemas.microsoft.com/office/drawing/2014/chart" uri="{C3380CC4-5D6E-409C-BE32-E72D297353CC}">
-                  <c16:uniqueId val="{0000000E-A764-476E-838F-179306D0A946}"/>
-                </c:ext>
-              </c:extLst>
-            </c:dLbl>
-            <c:dLbl>
-              <c:idx val="1"/>
-              <c:layout>
-                <c:manualLayout>
-                  <c:x val="9.8764026271243588E-3"/>
-                  <c:y val="1.2688952754440251E-2"/>
-                </c:manualLayout>
-              </c:layout>
-              <c:dLblPos val="ctr"/>
-              <c:showLegendKey val="0"/>
-              <c:showVal val="1"/>
-              <c:showCatName val="0"/>
-              <c:showSerName val="0"/>
-              <c:showPercent val="0"/>
-              <c:showBubbleSize val="0"/>
-              <c:extLst>
-                <c:ext xmlns:c15="http://schemas.microsoft.com/office/drawing/2012/chart" uri="{CE6537A1-D6FC-4f65-9D91-7224C49458BB}"/>
-                <c:ext xmlns:c16="http://schemas.microsoft.com/office/drawing/2014/chart" uri="{C3380CC4-5D6E-409C-BE32-E72D297353CC}">
-                  <c16:uniqueId val="{00000000-AB74-4B13-9738-4C2146AA1432}"/>
-                </c:ext>
-              </c:extLst>
-            </c:dLbl>
-            <c:dLbl>
-              <c:idx val="2"/>
-              <c:layout>
-                <c:manualLayout>
-                  <c:x val="1.1181729043817411E-2"/>
-                  <c:y val="6.3450804961210812E-3"/>
-                </c:manualLayout>
-              </c:layout>
-              <c:dLblPos val="ctr"/>
-              <c:showLegendKey val="0"/>
-              <c:showVal val="1"/>
-              <c:showCatName val="0"/>
-              <c:showSerName val="0"/>
-              <c:showPercent val="0"/>
-              <c:showBubbleSize val="0"/>
-              <c:extLst>
-                <c:ext xmlns:c15="http://schemas.microsoft.com/office/drawing/2012/chart" uri="{CE6537A1-D6FC-4f65-9D91-7224C49458BB}"/>
-                <c:ext xmlns:c16="http://schemas.microsoft.com/office/drawing/2014/chart" uri="{C3380CC4-5D6E-409C-BE32-E72D297353CC}">
-                  <c16:uniqueId val="{00000001-AB74-4B13-9738-4C2146AA1432}"/>
-                </c:ext>
-              </c:extLst>
-            </c:dLbl>
-            <c:dLbl>
-              <c:idx val="3"/>
-              <c:layout>
-                <c:manualLayout>
-                  <c:x val="1.6234275063443156E-2"/>
-                  <c:y val="3.1720856463124795E-3"/>
-                </c:manualLayout>
-              </c:layout>
-              <c:dLblPos val="ctr"/>
-              <c:showLegendKey val="0"/>
-              <c:showVal val="1"/>
-              <c:showCatName val="0"/>
-              <c:showSerName val="0"/>
-              <c:showPercent val="0"/>
-              <c:showBubbleSize val="0"/>
-              <c:extLst>
-                <c:ext xmlns:c15="http://schemas.microsoft.com/office/drawing/2012/chart" uri="{CE6537A1-D6FC-4f65-9D91-7224C49458BB}"/>
-                <c:ext xmlns:c16="http://schemas.microsoft.com/office/drawing/2014/chart" uri="{C3380CC4-5D6E-409C-BE32-E72D297353CC}">
-                  <c16:uniqueId val="{00000002-AB74-4B13-9738-4C2146AA1432}"/>
-                </c:ext>
-              </c:extLst>
-            </c:dLbl>
-            <c:dLbl>
-              <c:idx val="4"/>
-              <c:layout>
-                <c:manualLayout>
-                  <c:x val="-1.2920903690105045E-2"/>
-                  <c:y val="6.3446708336715642E-3"/>
-                </c:manualLayout>
-              </c:layout>
-              <c:dLblPos val="ctr"/>
-              <c:showLegendKey val="0"/>
-              <c:showVal val="1"/>
-              <c:showCatName val="0"/>
-              <c:showSerName val="0"/>
-              <c:showPercent val="0"/>
-              <c:showBubbleSize val="0"/>
-              <c:extLst>
-                <c:ext xmlns:c15="http://schemas.microsoft.com/office/drawing/2012/chart" uri="{CE6537A1-D6FC-4f65-9D91-7224C49458BB}"/>
-                <c:ext xmlns:c16="http://schemas.microsoft.com/office/drawing/2014/chart" uri="{C3380CC4-5D6E-409C-BE32-E72D297353CC}">
-                  <c16:uniqueId val="{00000003-AB74-4B13-9738-4C2146AA1432}"/>
-                </c:ext>
-              </c:extLst>
-            </c:dLbl>
-            <c:dLbl>
-              <c:idx val="5"/>
-              <c:delete val="1"/>
-              <c:extLst>
-                <c:ext xmlns:c15="http://schemas.microsoft.com/office/drawing/2012/chart" uri="{CE6537A1-D6FC-4f65-9D91-7224C49458BB}"/>
-                <c:ext xmlns:c16="http://schemas.microsoft.com/office/drawing/2014/chart" uri="{C3380CC4-5D6E-409C-BE32-E72D297353CC}">
-                  <c16:uniqueId val="{00000004-AB74-4B13-9738-4C2146AA1432}"/>
-                </c:ext>
-              </c:extLst>
-            </c:dLbl>
-            <c:dLbl>
-              <c:idx val="6"/>
-              <c:delete val="1"/>
-              <c:extLst>
-                <c:ext xmlns:c15="http://schemas.microsoft.com/office/drawing/2012/chart" uri="{CE6537A1-D6FC-4f65-9D91-7224C49458BB}"/>
-                <c:ext xmlns:c16="http://schemas.microsoft.com/office/drawing/2014/chart" uri="{C3380CC4-5D6E-409C-BE32-E72D297353CC}">
-                  <c16:uniqueId val="{00000005-AB74-4B13-9738-4C2146AA1432}"/>
-                </c:ext>
-              </c:extLst>
-            </c:dLbl>
-            <c:dLbl>
-              <c:idx val="7"/>
-              <c:layout>
-                <c:manualLayout>
-                  <c:x val="2.7244420534389721E-3"/>
-                  <c:y val="9.9908209332675613E-7"/>
-                </c:manualLayout>
-              </c:layout>
-              <c:dLblPos val="ctr"/>
-              <c:showLegendKey val="0"/>
-              <c:showVal val="1"/>
-              <c:showCatName val="0"/>
-              <c:showSerName val="0"/>
-              <c:showPercent val="0"/>
-              <c:showBubbleSize val="0"/>
-              <c:extLst>
-                <c:ext xmlns:c15="http://schemas.microsoft.com/office/drawing/2012/chart" uri="{CE6537A1-D6FC-4f65-9D91-7224C49458BB}"/>
-                <c:ext xmlns:c16="http://schemas.microsoft.com/office/drawing/2014/chart" uri="{C3380CC4-5D6E-409C-BE32-E72D297353CC}">
-                  <c16:uniqueId val="{00000006-AB74-4B13-9738-4C2146AA1432}"/>
-                </c:ext>
-              </c:extLst>
-            </c:dLbl>
-            <c:dLbl>
-              <c:idx val="8"/>
-              <c:delete val="1"/>
-              <c:extLst>
-                <c:ext xmlns:c15="http://schemas.microsoft.com/office/drawing/2012/chart" uri="{CE6537A1-D6FC-4f65-9D91-7224C49458BB}"/>
-                <c:ext xmlns:c16="http://schemas.microsoft.com/office/drawing/2014/chart" uri="{C3380CC4-5D6E-409C-BE32-E72D297353CC}">
-                  <c16:uniqueId val="{0000000C-A764-476E-838F-179306D0A946}"/>
-                </c:ext>
-              </c:extLst>
-            </c:dLbl>
-            <c:dLbl>
-              <c:idx val="9"/>
-              <c:dLblPos val="ctr"/>
-              <c:showLegendKey val="0"/>
-              <c:showVal val="1"/>
-              <c:showCatName val="0"/>
-              <c:showSerName val="0"/>
-              <c:showPercent val="0"/>
-              <c:showBubbleSize val="0"/>
-              <c:extLst>
-                <c:ext xmlns:c15="http://schemas.microsoft.com/office/drawing/2012/chart" uri="{CE6537A1-D6FC-4f65-9D91-7224C49458BB}"/>
-                <c:ext xmlns:c16="http://schemas.microsoft.com/office/drawing/2014/chart" uri="{C3380CC4-5D6E-409C-BE32-E72D297353CC}">
-                  <c16:uniqueId val="{0000000D-A764-476E-838F-179306D0A946}"/>
-                </c:ext>
-              </c:extLst>
-            </c:dLbl>
-            <c:dLbl>
-              <c:idx val="10"/>
-              <c:delete val="1"/>
-              <c:extLst>
-                <c:ext xmlns:c15="http://schemas.microsoft.com/office/drawing/2012/chart" uri="{CE6537A1-D6FC-4f65-9D91-7224C49458BB}"/>
-                <c:ext xmlns:c16="http://schemas.microsoft.com/office/drawing/2014/chart" uri="{C3380CC4-5D6E-409C-BE32-E72D297353CC}">
-                  <c16:uniqueId val="{00000007-AB74-4B13-9738-4C2146AA1432}"/>
-                </c:ext>
-              </c:extLst>
-            </c:dLbl>
-            <c:dLbl>
-              <c:idx val="11"/>
-              <c:dLblPos val="ctr"/>
-              <c:showLegendKey val="0"/>
-              <c:showVal val="1"/>
-              <c:showCatName val="0"/>
-              <c:showSerName val="0"/>
-              <c:showPercent val="0"/>
-              <c:showBubbleSize val="0"/>
-              <c:extLst>
-                <c:ext xmlns:c15="http://schemas.microsoft.com/office/drawing/2012/chart" uri="{CE6537A1-D6FC-4f65-9D91-7224C49458BB}"/>
-                <c:ext xmlns:c16="http://schemas.microsoft.com/office/drawing/2014/chart" uri="{C3380CC4-5D6E-409C-BE32-E72D297353CC}">
-                  <c16:uniqueId val="{00000008-AB74-4B13-9738-4C2146AA1432}"/>
-                </c:ext>
-              </c:extLst>
-            </c:dLbl>
             <c:spPr>
               <a:noFill/>
-              <a:ln w="24403">
+              <a:ln>
                 <a:noFill/>
               </a:ln>
+              <a:effectLst/>
             </c:spPr>
             <c:txPr>
-              <a:bodyPr anchorCtr="0"/>
+              <a:bodyPr wrap="square" lIns="38100" tIns="19050" rIns="38100" bIns="19050" anchor="ctr">
+                <a:spAutoFit/>
+              </a:bodyPr>
               <a:lstStyle/>
               <a:p>
-                <a:pPr algn="l">
-                  <a:defRPr lang="es-ES" sz="890" b="1">
+                <a:pPr>
+                  <a:defRPr sz="1100" b="1">
                     <a:solidFill>
                       <a:schemeClr val="bg1"/>
                     </a:solidFill>
@@ -2032,7 +1840,7 @@
             <c:showLeaderLines val="0"/>
             <c:extLst>
               <c:ext xmlns:c15="http://schemas.microsoft.com/office/drawing/2012/chart" uri="{CE6537A1-D6FC-4f65-9D91-7224C49458BB}">
-                <c15:showLeaderLines val="0"/>
+                <c15:showLeaderLines val="1"/>
               </c:ext>
             </c:extLst>
           </c:dLbls>
@@ -2057,8 +1865,17 @@
             <c:numRef>
               <c:f>Hoja1!$B$2:$B$4</c:f>
               <c:numCache>
-                <c:formatCode>General</c:formatCode>
+                <c:formatCode>0.0%</c:formatCode>
                 <c:ptCount val="3"/>
+                <c:pt idx="0">
+                  <c:v>0.33329999999999999</c:v>
+                </c:pt>
+                <c:pt idx="1">
+                  <c:v>0.33329999999999999</c:v>
+                </c:pt>
+                <c:pt idx="2">
+                  <c:v>0.33329999999999999</c:v>
+                </c:pt>
               </c:numCache>
             </c:numRef>
           </c:val>
@@ -2089,271 +1906,28 @@
           </c:spPr>
           <c:invertIfNegative val="0"/>
           <c:dLbls>
-            <c:dLbl>
-              <c:idx val="0"/>
-              <c:layout>
-                <c:manualLayout>
-                  <c:x val="1.7141770322187989E-2"/>
-                  <c:y val="0"/>
-                </c:manualLayout>
-              </c:layout>
-              <c:dLblPos val="ctr"/>
-              <c:showLegendKey val="0"/>
-              <c:showVal val="1"/>
-              <c:showCatName val="0"/>
-              <c:showSerName val="0"/>
-              <c:showPercent val="0"/>
-              <c:showBubbleSize val="0"/>
-              <c:extLst>
-                <c:ext xmlns:c15="http://schemas.microsoft.com/office/drawing/2012/chart" uri="{CE6537A1-D6FC-4f65-9D91-7224C49458BB}"/>
-                <c:ext xmlns:c16="http://schemas.microsoft.com/office/drawing/2014/chart" uri="{C3380CC4-5D6E-409C-BE32-E72D297353CC}">
-                  <c16:uniqueId val="{0000000A-AB74-4B13-9738-4C2146AA1432}"/>
-                </c:ext>
-              </c:extLst>
-            </c:dLbl>
-            <c:dLbl>
-              <c:idx val="1"/>
-              <c:layout>
-                <c:manualLayout>
-                  <c:x val="2.3134930581131825E-2"/>
-                  <c:y val="-1.3683178579679949E-2"/>
-                </c:manualLayout>
-              </c:layout>
-              <c:dLblPos val="ctr"/>
-              <c:showLegendKey val="0"/>
-              <c:showVal val="1"/>
-              <c:showCatName val="0"/>
-              <c:showSerName val="0"/>
-              <c:showPercent val="0"/>
-              <c:showBubbleSize val="0"/>
-              <c:extLst>
-                <c:ext xmlns:c15="http://schemas.microsoft.com/office/drawing/2012/chart" uri="{CE6537A1-D6FC-4f65-9D91-7224C49458BB}"/>
-                <c:ext xmlns:c16="http://schemas.microsoft.com/office/drawing/2014/chart" uri="{C3380CC4-5D6E-409C-BE32-E72D297353CC}">
-                  <c16:uniqueId val="{0000000B-AB74-4B13-9738-4C2146AA1432}"/>
-                </c:ext>
-              </c:extLst>
-            </c:dLbl>
-            <c:dLbl>
-              <c:idx val="2"/>
-              <c:layout>
-                <c:manualLayout>
-                  <c:x val="5.2144565373364746E-2"/>
-                  <c:y val="-3.6831456424665232E-3"/>
-                </c:manualLayout>
-              </c:layout>
-              <c:spPr>
-                <a:noFill/>
-                <a:ln w="24403">
-                  <a:noFill/>
-                </a:ln>
-              </c:spPr>
-              <c:txPr>
-                <a:bodyPr anchorCtr="0"/>
-                <a:lstStyle/>
-                <a:p>
-                  <a:pPr algn="r">
-                    <a:defRPr lang="es-ES" sz="986" b="1">
-                      <a:latin typeface="Montserrat" panose="00000500000000000000" pitchFamily="2" charset="0"/>
-                    </a:defRPr>
-                  </a:pPr>
-                  <a:endParaRPr lang="es-MX"/>
-                </a:p>
-              </c:txPr>
-              <c:dLblPos val="ctr"/>
-              <c:showLegendKey val="0"/>
-              <c:showVal val="1"/>
-              <c:showCatName val="0"/>
-              <c:showSerName val="0"/>
-              <c:showPercent val="0"/>
-              <c:showBubbleSize val="0"/>
-              <c:extLst>
-                <c:ext xmlns:c15="http://schemas.microsoft.com/office/drawing/2012/chart" uri="{CE6537A1-D6FC-4f65-9D91-7224C49458BB}"/>
-                <c:ext xmlns:c16="http://schemas.microsoft.com/office/drawing/2014/chart" uri="{C3380CC4-5D6E-409C-BE32-E72D297353CC}">
-                  <c16:uniqueId val="{0000000C-AB74-4B13-9738-4C2146AA1432}"/>
-                </c:ext>
-              </c:extLst>
-            </c:dLbl>
-            <c:dLbl>
-              <c:idx val="3"/>
-              <c:layout>
-                <c:manualLayout>
-                  <c:x val="3.2199670693337248E-2"/>
-                  <c:y val="3.6697247706422693E-3"/>
-                </c:manualLayout>
-              </c:layout>
-              <c:dLblPos val="ctr"/>
-              <c:showLegendKey val="0"/>
-              <c:showVal val="1"/>
-              <c:showCatName val="0"/>
-              <c:showSerName val="0"/>
-              <c:showPercent val="0"/>
-              <c:showBubbleSize val="0"/>
-              <c:extLst>
-                <c:ext xmlns:c15="http://schemas.microsoft.com/office/drawing/2012/chart" uri="{CE6537A1-D6FC-4f65-9D91-7224C49458BB}"/>
-                <c:ext xmlns:c16="http://schemas.microsoft.com/office/drawing/2014/chart" uri="{C3380CC4-5D6E-409C-BE32-E72D297353CC}">
-                  <c16:uniqueId val="{0000000D-AB74-4B13-9738-4C2146AA1432}"/>
-                </c:ext>
-              </c:extLst>
-            </c:dLbl>
-            <c:dLbl>
-              <c:idx val="4"/>
-              <c:layout>
-                <c:manualLayout>
-                  <c:x val="4.1048347217467383E-2"/>
-                  <c:y val="2.865781901751662E-3"/>
-                </c:manualLayout>
-              </c:layout>
-              <c:dLblPos val="ctr"/>
-              <c:showLegendKey val="0"/>
-              <c:showVal val="1"/>
-              <c:showCatName val="0"/>
-              <c:showSerName val="0"/>
-              <c:showPercent val="0"/>
-              <c:showBubbleSize val="0"/>
-              <c:extLst>
-                <c:ext xmlns:c15="http://schemas.microsoft.com/office/drawing/2012/chart" uri="{CE6537A1-D6FC-4f65-9D91-7224C49458BB}"/>
-                <c:ext xmlns:c16="http://schemas.microsoft.com/office/drawing/2014/chart" uri="{C3380CC4-5D6E-409C-BE32-E72D297353CC}">
-                  <c16:uniqueId val="{0000000E-AB74-4B13-9738-4C2146AA1432}"/>
-                </c:ext>
-              </c:extLst>
-            </c:dLbl>
-            <c:dLbl>
-              <c:idx val="5"/>
-              <c:delete val="1"/>
-              <c:extLst>
-                <c:ext xmlns:c15="http://schemas.microsoft.com/office/drawing/2012/chart" uri="{CE6537A1-D6FC-4f65-9D91-7224C49458BB}"/>
-                <c:ext xmlns:c16="http://schemas.microsoft.com/office/drawing/2014/chart" uri="{C3380CC4-5D6E-409C-BE32-E72D297353CC}">
-                  <c16:uniqueId val="{0000000F-AB74-4B13-9738-4C2146AA1432}"/>
-                </c:ext>
-              </c:extLst>
-            </c:dLbl>
-            <c:dLbl>
-              <c:idx val="6"/>
-              <c:delete val="1"/>
-              <c:extLst>
-                <c:ext xmlns:c15="http://schemas.microsoft.com/office/drawing/2012/chart" uri="{CE6537A1-D6FC-4f65-9D91-7224C49458BB}"/>
-                <c:ext xmlns:c16="http://schemas.microsoft.com/office/drawing/2014/chart" uri="{C3380CC4-5D6E-409C-BE32-E72D297353CC}">
-                  <c16:uniqueId val="{00000010-AB74-4B13-9738-4C2146AA1432}"/>
-                </c:ext>
-              </c:extLst>
-            </c:dLbl>
-            <c:dLbl>
-              <c:idx val="7"/>
-              <c:layout>
-                <c:manualLayout>
-                  <c:x val="4.5771017753215633E-2"/>
-                  <c:y val="1.4941272705701638E-3"/>
-                </c:manualLayout>
-              </c:layout>
-              <c:dLblPos val="ctr"/>
-              <c:showLegendKey val="0"/>
-              <c:showVal val="1"/>
-              <c:showCatName val="0"/>
-              <c:showSerName val="0"/>
-              <c:showPercent val="0"/>
-              <c:showBubbleSize val="0"/>
-              <c:extLst>
-                <c:ext xmlns:c15="http://schemas.microsoft.com/office/drawing/2012/chart" uri="{CE6537A1-D6FC-4f65-9D91-7224C49458BB}"/>
-                <c:ext xmlns:c16="http://schemas.microsoft.com/office/drawing/2014/chart" uri="{C3380CC4-5D6E-409C-BE32-E72D297353CC}">
-                  <c16:uniqueId val="{00000011-AB74-4B13-9738-4C2146AA1432}"/>
-                </c:ext>
-              </c:extLst>
-            </c:dLbl>
-            <c:dLbl>
-              <c:idx val="8"/>
-              <c:delete val="1"/>
-              <c:extLst>
-                <c:ext xmlns:c15="http://schemas.microsoft.com/office/drawing/2012/chart" uri="{CE6537A1-D6FC-4f65-9D91-7224C49458BB}"/>
-                <c:ext xmlns:c16="http://schemas.microsoft.com/office/drawing/2014/chart" uri="{C3380CC4-5D6E-409C-BE32-E72D297353CC}">
-                  <c16:uniqueId val="{00000012-AB74-4B13-9738-4C2146AA1432}"/>
-                </c:ext>
-              </c:extLst>
-            </c:dLbl>
-            <c:dLbl>
-              <c:idx val="9"/>
-              <c:layout>
-                <c:manualLayout>
-                  <c:x val="5.4132363889296447E-3"/>
-                  <c:y val="0"/>
-                </c:manualLayout>
-              </c:layout>
-              <c:dLblPos val="ctr"/>
-              <c:showLegendKey val="0"/>
-              <c:showVal val="1"/>
-              <c:showCatName val="0"/>
-              <c:showSerName val="0"/>
-              <c:showPercent val="0"/>
-              <c:showBubbleSize val="0"/>
-              <c:extLst>
-                <c:ext xmlns:c15="http://schemas.microsoft.com/office/drawing/2012/chart" uri="{CE6537A1-D6FC-4f65-9D91-7224C49458BB}"/>
-                <c:ext xmlns:c16="http://schemas.microsoft.com/office/drawing/2014/chart" uri="{C3380CC4-5D6E-409C-BE32-E72D297353CC}">
-                  <c16:uniqueId val="{00000013-AB74-4B13-9738-4C2146AA1432}"/>
-                </c:ext>
-              </c:extLst>
-            </c:dLbl>
-            <c:dLbl>
-              <c:idx val="10"/>
-              <c:layout>
-                <c:manualLayout>
-                  <c:x val="4.1147030534216577E-4"/>
-                  <c:y val="-3.1715861052657871E-3"/>
-                </c:manualLayout>
-              </c:layout>
-              <c:dLblPos val="ctr"/>
-              <c:showLegendKey val="0"/>
-              <c:showVal val="1"/>
-              <c:showCatName val="0"/>
-              <c:showSerName val="0"/>
-              <c:showPercent val="0"/>
-              <c:showBubbleSize val="0"/>
-              <c:extLst>
-                <c:ext xmlns:c15="http://schemas.microsoft.com/office/drawing/2012/chart" uri="{CE6537A1-D6FC-4f65-9D91-7224C49458BB}"/>
-                <c:ext xmlns:c16="http://schemas.microsoft.com/office/drawing/2014/chart" uri="{C3380CC4-5D6E-409C-BE32-E72D297353CC}">
-                  <c16:uniqueId val="{00000014-AB74-4B13-9738-4C2146AA1432}"/>
-                </c:ext>
-              </c:extLst>
-            </c:dLbl>
-            <c:dLbl>
-              <c:idx val="11"/>
-              <c:layout>
-                <c:manualLayout>
-                  <c:x val="-5.8747004450530639E-3"/>
-                  <c:y val="-3.1718358757891188E-3"/>
-                </c:manualLayout>
-              </c:layout>
-              <c:dLblPos val="ctr"/>
-              <c:showLegendKey val="0"/>
-              <c:showVal val="1"/>
-              <c:showCatName val="0"/>
-              <c:showSerName val="0"/>
-              <c:showPercent val="0"/>
-              <c:showBubbleSize val="0"/>
-              <c:extLst>
-                <c:ext xmlns:c15="http://schemas.microsoft.com/office/drawing/2012/chart" uri="{CE6537A1-D6FC-4f65-9D91-7224C49458BB}"/>
-                <c:ext xmlns:c16="http://schemas.microsoft.com/office/drawing/2014/chart" uri="{C3380CC4-5D6E-409C-BE32-E72D297353CC}">
-                  <c16:uniqueId val="{00000015-AB74-4B13-9738-4C2146AA1432}"/>
-                </c:ext>
-              </c:extLst>
-            </c:dLbl>
             <c:spPr>
               <a:noFill/>
-              <a:ln w="24403">
+              <a:ln>
                 <a:noFill/>
               </a:ln>
+              <a:effectLst/>
             </c:spPr>
             <c:txPr>
-              <a:bodyPr/>
+              <a:bodyPr wrap="square" lIns="38100" tIns="19050" rIns="38100" bIns="19050" anchor="ctr">
+                <a:spAutoFit/>
+              </a:bodyPr>
               <a:lstStyle/>
               <a:p>
                 <a:pPr>
-                  <a:defRPr lang="es-ES" sz="986" b="1">
+                  <a:defRPr sz="1100" b="1">
                     <a:latin typeface="Montserrat" panose="00000500000000000000" pitchFamily="2" charset="0"/>
                   </a:defRPr>
                 </a:pPr>
                 <a:endParaRPr lang="es-MX"/>
               </a:p>
             </c:txPr>
-            <c:dLblPos val="inBase"/>
+            <c:dLblPos val="ctr"/>
             <c:showLegendKey val="0"/>
             <c:showVal val="1"/>
             <c:showCatName val="0"/>
@@ -2363,7 +1937,7 @@
             <c:showLeaderLines val="0"/>
             <c:extLst>
               <c:ext xmlns:c15="http://schemas.microsoft.com/office/drawing/2012/chart" uri="{CE6537A1-D6FC-4f65-9D91-7224C49458BB}">
-                <c15:showLeaderLines val="0"/>
+                <c15:showLeaderLines val="1"/>
               </c:ext>
             </c:extLst>
           </c:dLbls>
@@ -2391,10 +1965,13 @@
                 <c:formatCode>0.0%</c:formatCode>
                 <c:ptCount val="3"/>
                 <c:pt idx="0">
-                  <c:v>0.26700000000000002</c:v>
+                  <c:v>0.33329999999999999</c:v>
                 </c:pt>
                 <c:pt idx="1">
-                  <c:v>0.23100000000000001</c:v>
+                  <c:v>0.33329999999999999</c:v>
+                </c:pt>
+                <c:pt idx="2">
+                  <c:v>0.33329999999999999</c:v>
                 </c:pt>
               </c:numCache>
             </c:numRef>
@@ -2441,9 +2018,7 @@
             <c:bubble3D val="0"/>
             <c:spPr>
               <a:solidFill>
-                <a:schemeClr val="bg1">
-                  <a:lumMod val="65000"/>
-                </a:schemeClr>
+                <a:srgbClr val="00B050"/>
               </a:solidFill>
             </c:spPr>
             <c:extLst>
@@ -2458,9 +2033,7 @@
             <c:bubble3D val="0"/>
             <c:spPr>
               <a:solidFill>
-                <a:schemeClr val="bg1">
-                  <a:lumMod val="65000"/>
-                </a:schemeClr>
+                <a:srgbClr val="00B050"/>
               </a:solidFill>
             </c:spPr>
             <c:extLst>
@@ -2475,9 +2048,7 @@
             <c:bubble3D val="0"/>
             <c:spPr>
               <a:solidFill>
-                <a:schemeClr val="bg1">
-                  <a:lumMod val="65000"/>
-                </a:schemeClr>
+                <a:srgbClr val="00B050"/>
               </a:solidFill>
             </c:spPr>
             <c:extLst>
@@ -2542,9 +2113,7 @@
             <c:bubble3D val="0"/>
             <c:spPr>
               <a:solidFill>
-                <a:schemeClr val="bg1">
-                  <a:lumMod val="65000"/>
-                </a:schemeClr>
+                <a:srgbClr val="00B050"/>
               </a:solidFill>
             </c:spPr>
             <c:extLst>
@@ -2554,192 +2123,21 @@
             </c:extLst>
           </c:dPt>
           <c:dLbls>
-            <c:dLbl>
-              <c:idx val="1"/>
-              <c:layout>
-                <c:manualLayout>
-                  <c:x val="0.1067287654402173"/>
-                  <c:y val="3.6834356767719159E-3"/>
-                </c:manualLayout>
-              </c:layout>
-              <c:dLblPos val="ctr"/>
-              <c:showLegendKey val="0"/>
-              <c:showVal val="1"/>
-              <c:showCatName val="0"/>
-              <c:showSerName val="0"/>
-              <c:showPercent val="0"/>
-              <c:showBubbleSize val="0"/>
-              <c:extLst>
-                <c:ext xmlns:c15="http://schemas.microsoft.com/office/drawing/2012/chart" uri="{CE6537A1-D6FC-4f65-9D91-7224C49458BB}"/>
-                <c:ext xmlns:c16="http://schemas.microsoft.com/office/drawing/2014/chart" uri="{C3380CC4-5D6E-409C-BE32-E72D297353CC}">
-                  <c16:uniqueId val="{0000000F-61F9-46CD-BFD9-03373F423D69}"/>
-                </c:ext>
-              </c:extLst>
-            </c:dLbl>
-            <c:dLbl>
-              <c:idx val="2"/>
-              <c:delete val="1"/>
-              <c:extLst>
-                <c:ext xmlns:c15="http://schemas.microsoft.com/office/drawing/2012/chart" uri="{CE6537A1-D6FC-4f65-9D91-7224C49458BB}"/>
-                <c:ext xmlns:c16="http://schemas.microsoft.com/office/drawing/2014/chart" uri="{C3380CC4-5D6E-409C-BE32-E72D297353CC}">
-                  <c16:uniqueId val="{00000010-61F9-46CD-BFD9-03373F423D69}"/>
-                </c:ext>
-              </c:extLst>
-            </c:dLbl>
-            <c:dLbl>
-              <c:idx val="3"/>
-              <c:delete val="1"/>
-              <c:extLst>
-                <c:ext xmlns:c15="http://schemas.microsoft.com/office/drawing/2012/chart" uri="{CE6537A1-D6FC-4f65-9D91-7224C49458BB}"/>
-                <c:ext xmlns:c16="http://schemas.microsoft.com/office/drawing/2014/chart" uri="{C3380CC4-5D6E-409C-BE32-E72D297353CC}">
-                  <c16:uniqueId val="{0000000D-D683-4626-8037-49DAEE2B4FB9}"/>
-                </c:ext>
-              </c:extLst>
-            </c:dLbl>
-            <c:dLbl>
-              <c:idx val="5"/>
-              <c:delete val="1"/>
-              <c:extLst>
-                <c:ext xmlns:c15="http://schemas.microsoft.com/office/drawing/2012/chart" uri="{CE6537A1-D6FC-4f65-9D91-7224C49458BB}"/>
-                <c:ext xmlns:c16="http://schemas.microsoft.com/office/drawing/2014/chart" uri="{C3380CC4-5D6E-409C-BE32-E72D297353CC}">
-                  <c16:uniqueId val="{00000009-DEDC-4BE0-8182-1747BEE4A134}"/>
-                </c:ext>
-              </c:extLst>
-            </c:dLbl>
-            <c:dLbl>
-              <c:idx val="6"/>
-              <c:delete val="1"/>
-              <c:extLst>
-                <c:ext xmlns:c15="http://schemas.microsoft.com/office/drawing/2012/chart" uri="{CE6537A1-D6FC-4f65-9D91-7224C49458BB}"/>
-                <c:ext xmlns:c16="http://schemas.microsoft.com/office/drawing/2014/chart" uri="{C3380CC4-5D6E-409C-BE32-E72D297353CC}">
-                  <c16:uniqueId val="{0000000A-DEDC-4BE0-8182-1747BEE4A134}"/>
-                </c:ext>
-              </c:extLst>
-            </c:dLbl>
-            <c:dLbl>
-              <c:idx val="8"/>
-              <c:delete val="1"/>
-              <c:extLst>
-                <c:ext xmlns:c15="http://schemas.microsoft.com/office/drawing/2012/chart" uri="{CE6537A1-D6FC-4f65-9D91-7224C49458BB}"/>
-                <c:ext xmlns:c16="http://schemas.microsoft.com/office/drawing/2014/chart" uri="{C3380CC4-5D6E-409C-BE32-E72D297353CC}">
-                  <c16:uniqueId val="{00000007-65D3-4B66-877D-E6D1D7580DD5}"/>
-                </c:ext>
-              </c:extLst>
-            </c:dLbl>
-            <c:dLbl>
-              <c:idx val="9"/>
-              <c:layout>
-                <c:manualLayout>
-                  <c:x val="0.12146307798481691"/>
-                  <c:y val="-3.1720856463124504E-3"/>
-                </c:manualLayout>
-              </c:layout>
-              <c:dLblPos val="ctr"/>
-              <c:showLegendKey val="0"/>
-              <c:showVal val="1"/>
-              <c:showCatName val="0"/>
-              <c:showSerName val="0"/>
-              <c:showPercent val="0"/>
-              <c:showBubbleSize val="0"/>
-              <c:extLst>
-                <c:ext xmlns:c15="http://schemas.microsoft.com/office/drawing/2012/chart" uri="{CE6537A1-D6FC-4f65-9D91-7224C49458BB}"/>
-                <c:ext xmlns:c16="http://schemas.microsoft.com/office/drawing/2014/chart" uri="{C3380CC4-5D6E-409C-BE32-E72D297353CC}">
-                  <c16:uniqueId val="{00000017-AB74-4B13-9738-4C2146AA1432}"/>
-                </c:ext>
-              </c:extLst>
-            </c:dLbl>
-            <c:dLbl>
-              <c:idx val="10"/>
-              <c:layout>
-                <c:manualLayout>
-                  <c:x val="0.16011042097998621"/>
-                  <c:y val="6.3441712926250171E-3"/>
-                </c:manualLayout>
-              </c:layout>
-              <c:dLblPos val="ctr"/>
-              <c:showLegendKey val="0"/>
-              <c:showVal val="1"/>
-              <c:showCatName val="0"/>
-              <c:showSerName val="0"/>
-              <c:showPercent val="0"/>
-              <c:showBubbleSize val="0"/>
-              <c:extLst>
-                <c:ext xmlns:c15="http://schemas.microsoft.com/office/drawing/2012/chart" uri="{CE6537A1-D6FC-4f65-9D91-7224C49458BB}"/>
-                <c:ext xmlns:c16="http://schemas.microsoft.com/office/drawing/2014/chart" uri="{C3380CC4-5D6E-409C-BE32-E72D297353CC}">
-                  <c16:uniqueId val="{00000018-AB74-4B13-9738-4C2146AA1432}"/>
-                </c:ext>
-              </c:extLst>
-            </c:dLbl>
-            <c:dLbl>
-              <c:idx val="11"/>
-              <c:dLblPos val="ctr"/>
-              <c:showLegendKey val="0"/>
-              <c:showVal val="1"/>
-              <c:showCatName val="0"/>
-              <c:showSerName val="0"/>
-              <c:showPercent val="0"/>
-              <c:showBubbleSize val="0"/>
-              <c:extLst>
-                <c:ext xmlns:c15="http://schemas.microsoft.com/office/drawing/2012/chart" uri="{CE6537A1-D6FC-4f65-9D91-7224C49458BB}"/>
-                <c:ext xmlns:c16="http://schemas.microsoft.com/office/drawing/2014/chart" uri="{C3380CC4-5D6E-409C-BE32-E72D297353CC}">
-                  <c16:uniqueId val="{00000019-AB74-4B13-9738-4C2146AA1432}"/>
-                </c:ext>
-              </c:extLst>
-            </c:dLbl>
-            <c:dLbl>
-              <c:idx val="12"/>
-              <c:dLblPos val="ctr"/>
-              <c:showLegendKey val="0"/>
-              <c:showVal val="1"/>
-              <c:showCatName val="0"/>
-              <c:showSerName val="0"/>
-              <c:showPercent val="0"/>
-              <c:showBubbleSize val="0"/>
-              <c:extLst>
-                <c:ext xmlns:c15="http://schemas.microsoft.com/office/drawing/2012/chart" uri="{CE6537A1-D6FC-4f65-9D91-7224C49458BB}"/>
-                <c:ext xmlns:c16="http://schemas.microsoft.com/office/drawing/2014/chart" uri="{C3380CC4-5D6E-409C-BE32-E72D297353CC}">
-                  <c16:uniqueId val="{0000001A-AB74-4B13-9738-4C2146AA1432}"/>
-                </c:ext>
-              </c:extLst>
-            </c:dLbl>
-            <c:dLbl>
-              <c:idx val="13"/>
-              <c:dLblPos val="ctr"/>
-              <c:showLegendKey val="0"/>
-              <c:showVal val="1"/>
-              <c:showCatName val="0"/>
-              <c:showSerName val="0"/>
-              <c:showPercent val="0"/>
-              <c:showBubbleSize val="0"/>
-              <c:extLst>
-                <c:ext xmlns:c15="http://schemas.microsoft.com/office/drawing/2012/chart" uri="{CE6537A1-D6FC-4f65-9D91-7224C49458BB}"/>
-                <c:ext xmlns:c16="http://schemas.microsoft.com/office/drawing/2014/chart" uri="{C3380CC4-5D6E-409C-BE32-E72D297353CC}">
-                  <c16:uniqueId val="{0000001B-AB74-4B13-9738-4C2146AA1432}"/>
-                </c:ext>
-              </c:extLst>
-            </c:dLbl>
-            <c:dLbl>
-              <c:idx val="14"/>
-              <c:delete val="1"/>
-              <c:extLst>
-                <c:ext xmlns:c15="http://schemas.microsoft.com/office/drawing/2012/chart" uri="{CE6537A1-D6FC-4f65-9D91-7224C49458BB}"/>
-                <c:ext xmlns:c16="http://schemas.microsoft.com/office/drawing/2014/chart" uri="{C3380CC4-5D6E-409C-BE32-E72D297353CC}">
-                  <c16:uniqueId val="{0000001C-AB74-4B13-9738-4C2146AA1432}"/>
-                </c:ext>
-              </c:extLst>
-            </c:dLbl>
             <c:spPr>
               <a:noFill/>
-              <a:ln w="24403">
+              <a:ln>
                 <a:noFill/>
               </a:ln>
+              <a:effectLst/>
             </c:spPr>
             <c:txPr>
-              <a:bodyPr/>
+              <a:bodyPr wrap="square" lIns="38100" tIns="19050" rIns="38100" bIns="19050" anchor="ctr">
+                <a:spAutoFit/>
+              </a:bodyPr>
               <a:lstStyle/>
               <a:p>
                 <a:pPr>
-                  <a:defRPr lang="es-ES" sz="986" b="1">
+                  <a:defRPr sz="1100" b="1">
                     <a:solidFill>
                       <a:schemeClr val="bg1"/>
                     </a:solidFill>
@@ -2759,7 +2157,7 @@
             <c:showLeaderLines val="0"/>
             <c:extLst>
               <c:ext xmlns:c15="http://schemas.microsoft.com/office/drawing/2012/chart" uri="{CE6537A1-D6FC-4f65-9D91-7224C49458BB}">
-                <c15:showLeaderLines val="0"/>
+                <c15:showLeaderLines val="1"/>
               </c:ext>
             </c:extLst>
           </c:dLbls>
@@ -2787,13 +2185,13 @@
                 <c:formatCode>0.0%</c:formatCode>
                 <c:ptCount val="3"/>
                 <c:pt idx="0">
-                  <c:v>0.73299999999999998</c:v>
+                  <c:v>0.33329999999999999</c:v>
                 </c:pt>
                 <c:pt idx="1">
-                  <c:v>0.76900000000000002</c:v>
+                  <c:v>0.33329999999999999</c:v>
                 </c:pt>
                 <c:pt idx="2">
-                  <c:v>1</c:v>
+                  <c:v>0.33329999999999999</c:v>
                 </c:pt>
               </c:numCache>
             </c:numRef>
@@ -2805,8 +2203,9 @@
           </c:extLst>
         </c:ser>
         <c:dLbls>
+          <c:dLblPos val="inEnd"/>
           <c:showLegendKey val="0"/>
-          <c:showVal val="0"/>
+          <c:showVal val="1"/>
           <c:showCatName val="0"/>
           <c:showSerName val="0"/>
           <c:showPercent val="0"/>
@@ -4330,7 +3729,7 @@
               <a:pPr>
                 <a:defRPr/>
               </a:pPr>
-              <a:t>17/07/2026</a:t>
+              <a:t>05/10/2026</a:t>
             </a:fld>
             <a:endParaRPr lang="es-ES_tradnl"/>
           </a:p>
@@ -6442,7 +5841,7 @@
               <a:pPr>
                 <a:defRPr/>
               </a:pPr>
-              <a:t>17/07/2026</a:t>
+              <a:t>05/10/2026</a:t>
             </a:fld>
             <a:endParaRPr lang="es-ES"/>
           </a:p>
@@ -6769,7 +6168,7 @@
               <a:pPr>
                 <a:defRPr/>
               </a:pPr>
-              <a:t>17/07/2026</a:t>
+              <a:t>05/10/2026</a:t>
             </a:fld>
             <a:endParaRPr lang="es-ES"/>
           </a:p>
@@ -7010,7 +6409,7 @@
               <a:pPr>
                 <a:defRPr/>
               </a:pPr>
-              <a:t>17/07/2026</a:t>
+              <a:t>05/10/2026</a:t>
             </a:fld>
             <a:endParaRPr lang="es-ES"/>
           </a:p>
@@ -7261,7 +6660,7 @@
               <a:pPr>
                 <a:defRPr/>
               </a:pPr>
-              <a:t>17/07/2026</a:t>
+              <a:t>05/10/2026</a:t>
             </a:fld>
             <a:endParaRPr lang="es-ES"/>
           </a:p>
@@ -7776,7 +7175,7 @@
               <a:pPr>
                 <a:defRPr/>
               </a:pPr>
-              <a:t>17/07/2026</a:t>
+              <a:t>05/10/2026</a:t>
             </a:fld>
             <a:endParaRPr lang="es-MX"/>
           </a:p>
@@ -7978,7 +7377,7 @@
               <a:pPr>
                 <a:defRPr/>
               </a:pPr>
-              <a:t>17/07/2026</a:t>
+              <a:t>05/10/2026</a:t>
             </a:fld>
             <a:endParaRPr lang="es-MX"/>
           </a:p>
@@ -8256,7 +7655,7 @@
               <a:pPr>
                 <a:defRPr/>
               </a:pPr>
-              <a:t>17/07/2026</a:t>
+              <a:t>05/10/2026</a:t>
             </a:fld>
             <a:endParaRPr lang="es-MX"/>
           </a:p>
@@ -8661,7 +8060,7 @@
               <a:pPr>
                 <a:defRPr/>
               </a:pPr>
-              <a:t>17/07/2026</a:t>
+              <a:t>05/10/2026</a:t>
             </a:fld>
             <a:endParaRPr lang="es-MX"/>
           </a:p>
@@ -9349,7 +8748,7 @@
               <a:pPr>
                 <a:defRPr/>
               </a:pPr>
-              <a:t>17/07/2026</a:t>
+              <a:t>05/10/2026</a:t>
             </a:fld>
             <a:endParaRPr lang="es-MX"/>
           </a:p>
@@ -9499,7 +8898,7 @@
               <a:pPr>
                 <a:defRPr/>
               </a:pPr>
-              <a:t>17/07/2026</a:t>
+              <a:t>05/10/2026</a:t>
             </a:fld>
             <a:endParaRPr lang="es-MX"/>
           </a:p>
@@ -9701,7 +9100,7 @@
               <a:pPr>
                 <a:defRPr/>
               </a:pPr>
-              <a:t>17/07/2026</a:t>
+              <a:t>05/10/2026</a:t>
             </a:fld>
             <a:endParaRPr lang="es-ES"/>
           </a:p>
@@ -10215,7 +9614,7 @@
               <a:pPr>
                 <a:defRPr/>
               </a:pPr>
-              <a:t>17/07/2026</a:t>
+              <a:t>05/10/2026</a:t>
             </a:fld>
             <a:endParaRPr lang="es-MX"/>
           </a:p>
@@ -10507,7 +9906,7 @@
               <a:pPr>
                 <a:defRPr/>
               </a:pPr>
-              <a:t>17/07/2026</a:t>
+              <a:t>05/10/2026</a:t>
             </a:fld>
             <a:endParaRPr lang="es-MX"/>
           </a:p>
@@ -10714,7 +10113,7 @@
               <a:pPr>
                 <a:defRPr/>
               </a:pPr>
-              <a:t>17/07/2026</a:t>
+              <a:t>05/10/2026</a:t>
             </a:fld>
             <a:endParaRPr lang="es-MX"/>
           </a:p>
@@ -10926,7 +10325,7 @@
               <a:pPr>
                 <a:defRPr/>
               </a:pPr>
-              <a:t>17/07/2026</a:t>
+              <a:t>05/10/2026</a:t>
             </a:fld>
             <a:endParaRPr lang="es-MX"/>
           </a:p>
@@ -11230,7 +10629,7 @@
               <a:pPr>
                 <a:defRPr/>
               </a:pPr>
-              <a:t>17/07/2026</a:t>
+              <a:t>05/10/2026</a:t>
             </a:fld>
             <a:endParaRPr lang="es-ES"/>
           </a:p>
@@ -11471,7 +10870,7 @@
               <a:pPr>
                 <a:defRPr/>
               </a:pPr>
-              <a:t>17/07/2026</a:t>
+              <a:t>05/10/2026</a:t>
             </a:fld>
             <a:endParaRPr lang="es-ES"/>
           </a:p>
@@ -11788,7 +11187,7 @@
               <a:pPr>
                 <a:defRPr/>
               </a:pPr>
-              <a:t>17/07/2026</a:t>
+              <a:t>05/10/2026</a:t>
             </a:fld>
             <a:endParaRPr lang="es-ES"/>
           </a:p>
@@ -12147,7 +11546,7 @@
               <a:pPr>
                 <a:defRPr/>
               </a:pPr>
-              <a:t>17/07/2026</a:t>
+              <a:t>05/10/2026</a:t>
             </a:fld>
             <a:endParaRPr lang="es-ES"/>
           </a:p>
@@ -12464,7 +11863,7 @@
               <a:pPr>
                 <a:defRPr/>
               </a:pPr>
-              <a:t>17/07/2026</a:t>
+              <a:t>05/10/2026</a:t>
             </a:fld>
             <a:endParaRPr lang="es-ES"/>
           </a:p>
@@ -12957,7 +12356,7 @@
               <a:pPr>
                 <a:defRPr/>
               </a:pPr>
-              <a:t>17/07/2026</a:t>
+              <a:t>05/10/2026</a:t>
             </a:fld>
             <a:endParaRPr lang="es-ES"/>
           </a:p>
@@ -13146,7 +12545,7 @@
               <a:pPr>
                 <a:defRPr/>
               </a:pPr>
-              <a:t>17/07/2026</a:t>
+              <a:t>05/10/2026</a:t>
             </a:fld>
             <a:endParaRPr lang="es-ES"/>
           </a:p>
@@ -13312,7 +12711,7 @@
               <a:pPr>
                 <a:defRPr/>
               </a:pPr>
-              <a:t>17/07/2026</a:t>
+              <a:t>05/10/2026</a:t>
             </a:fld>
             <a:endParaRPr lang="es-ES"/>
           </a:p>
@@ -13662,7 +13061,7 @@
               <a:pPr>
                 <a:defRPr/>
               </a:pPr>
-              <a:t>17/07/2026</a:t>
+              <a:t>05/10/2026</a:t>
             </a:fld>
             <a:endParaRPr lang="es-ES"/>
           </a:p>
@@ -14010,7 +13409,7 @@
               <a:pPr>
                 <a:defRPr/>
               </a:pPr>
-              <a:t>17/07/2026</a:t>
+              <a:t>05/10/2026</a:t>
             </a:fld>
             <a:endParaRPr lang="es-ES"/>
           </a:p>
@@ -14337,7 +13736,7 @@
               <a:pPr>
                 <a:defRPr/>
               </a:pPr>
-              <a:t>17/07/2026</a:t>
+              <a:t>05/10/2026</a:t>
             </a:fld>
             <a:endParaRPr lang="es-ES"/>
           </a:p>
@@ -14578,7 +13977,7 @@
               <a:pPr>
                 <a:defRPr/>
               </a:pPr>
-              <a:t>17/07/2026</a:t>
+              <a:t>05/10/2026</a:t>
             </a:fld>
             <a:endParaRPr lang="es-ES"/>
           </a:p>
@@ -14829,7 +14228,7 @@
               <a:pPr>
                 <a:defRPr/>
               </a:pPr>
-              <a:t>17/07/2026</a:t>
+              <a:t>05/10/2026</a:t>
             </a:fld>
             <a:endParaRPr lang="es-ES"/>
           </a:p>
@@ -15232,7 +14631,7 @@
               <a:pPr>
                 <a:defRPr/>
               </a:pPr>
-              <a:t>17/07/2026</a:t>
+              <a:t>05/10/2026</a:t>
             </a:fld>
             <a:endParaRPr lang="es-ES"/>
           </a:p>
@@ -15591,7 +14990,7 @@
               <a:pPr>
                 <a:defRPr/>
               </a:pPr>
-              <a:t>17/07/2026</a:t>
+              <a:t>05/10/2026</a:t>
             </a:fld>
             <a:endParaRPr lang="es-ES"/>
           </a:p>
@@ -15832,7 +15231,7 @@
               <a:pPr>
                 <a:defRPr/>
               </a:pPr>
-              <a:t>17/07/2026</a:t>
+              <a:t>05/10/2026</a:t>
             </a:fld>
             <a:endParaRPr lang="es-ES"/>
           </a:p>
@@ -16149,7 +15548,7 @@
               <a:pPr>
                 <a:defRPr/>
               </a:pPr>
-              <a:t>17/07/2026</a:t>
+              <a:t>05/10/2026</a:t>
             </a:fld>
             <a:endParaRPr lang="es-ES"/>
           </a:p>
@@ -16508,7 +15907,7 @@
               <a:pPr>
                 <a:defRPr/>
               </a:pPr>
-              <a:t>17/07/2026</a:t>
+              <a:t>05/10/2026</a:t>
             </a:fld>
             <a:endParaRPr lang="es-ES"/>
           </a:p>
@@ -17001,7 +16400,7 @@
               <a:pPr>
                 <a:defRPr/>
               </a:pPr>
-              <a:t>17/07/2026</a:t>
+              <a:t>05/10/2026</a:t>
             </a:fld>
             <a:endParaRPr lang="es-ES"/>
           </a:p>
@@ -17190,7 +16589,7 @@
               <a:pPr>
                 <a:defRPr/>
               </a:pPr>
-              <a:t>17/07/2026</a:t>
+              <a:t>05/10/2026</a:t>
             </a:fld>
             <a:endParaRPr lang="es-ES"/>
           </a:p>
@@ -17356,7 +16755,7 @@
               <a:pPr>
                 <a:defRPr/>
               </a:pPr>
-              <a:t>17/07/2026</a:t>
+              <a:t>05/10/2026</a:t>
             </a:fld>
             <a:endParaRPr lang="es-ES"/>
           </a:p>
@@ -17706,7 +17105,7 @@
               <a:pPr>
                 <a:defRPr/>
               </a:pPr>
-              <a:t>17/07/2026</a:t>
+              <a:t>05/10/2026</a:t>
             </a:fld>
             <a:endParaRPr lang="es-ES"/>
           </a:p>
@@ -18054,7 +17453,7 @@
               <a:pPr>
                 <a:defRPr/>
               </a:pPr>
-              <a:t>17/07/2026</a:t>
+              <a:t>05/10/2026</a:t>
             </a:fld>
             <a:endParaRPr lang="es-ES"/>
           </a:p>
@@ -18381,7 +17780,7 @@
               <a:pPr>
                 <a:defRPr/>
               </a:pPr>
-              <a:t>17/07/2026</a:t>
+              <a:t>05/10/2026</a:t>
             </a:fld>
             <a:endParaRPr lang="es-ES"/>
           </a:p>
@@ -18622,7 +18021,7 @@
               <a:pPr>
                 <a:defRPr/>
               </a:pPr>
-              <a:t>17/07/2026</a:t>
+              <a:t>05/10/2026</a:t>
             </a:fld>
             <a:endParaRPr lang="es-ES"/>
           </a:p>
@@ -19115,7 +18514,7 @@
               <a:pPr>
                 <a:defRPr/>
               </a:pPr>
-              <a:t>17/07/2026</a:t>
+              <a:t>05/10/2026</a:t>
             </a:fld>
             <a:endParaRPr lang="es-ES"/>
           </a:p>
@@ -19366,7 +18765,7 @@
               <a:pPr>
                 <a:defRPr/>
               </a:pPr>
-              <a:t>17/07/2026</a:t>
+              <a:t>05/10/2026</a:t>
             </a:fld>
             <a:endParaRPr lang="es-ES"/>
           </a:p>
@@ -19769,7 +19168,7 @@
               <a:pPr>
                 <a:defRPr/>
               </a:pPr>
-              <a:t>17/07/2026</a:t>
+              <a:t>05/10/2026</a:t>
             </a:fld>
             <a:endParaRPr lang="es-ES"/>
           </a:p>
@@ -20010,7 +19409,7 @@
               <a:pPr>
                 <a:defRPr/>
               </a:pPr>
-              <a:t>17/07/2026</a:t>
+              <a:t>05/10/2026</a:t>
             </a:fld>
             <a:endParaRPr lang="es-ES"/>
           </a:p>
@@ -20327,7 +19726,7 @@
               <a:pPr>
                 <a:defRPr/>
               </a:pPr>
-              <a:t>17/07/2026</a:t>
+              <a:t>05/10/2026</a:t>
             </a:fld>
             <a:endParaRPr lang="es-ES"/>
           </a:p>
@@ -20686,7 +20085,7 @@
               <a:pPr>
                 <a:defRPr/>
               </a:pPr>
-              <a:t>17/07/2026</a:t>
+              <a:t>05/10/2026</a:t>
             </a:fld>
             <a:endParaRPr lang="es-ES"/>
           </a:p>
@@ -21179,7 +20578,7 @@
               <a:pPr>
                 <a:defRPr/>
               </a:pPr>
-              <a:t>17/07/2026</a:t>
+              <a:t>05/10/2026</a:t>
             </a:fld>
             <a:endParaRPr lang="es-ES"/>
           </a:p>
@@ -21368,7 +20767,7 @@
               <a:pPr>
                 <a:defRPr/>
               </a:pPr>
-              <a:t>17/07/2026</a:t>
+              <a:t>05/10/2026</a:t>
             </a:fld>
             <a:endParaRPr lang="es-ES"/>
           </a:p>
@@ -21534,7 +20933,7 @@
               <a:pPr>
                 <a:defRPr/>
               </a:pPr>
-              <a:t>17/07/2026</a:t>
+              <a:t>05/10/2026</a:t>
             </a:fld>
             <a:endParaRPr lang="es-ES"/>
           </a:p>
@@ -21884,7 +21283,7 @@
               <a:pPr>
                 <a:defRPr/>
               </a:pPr>
-              <a:t>17/07/2026</a:t>
+              <a:t>05/10/2026</a:t>
             </a:fld>
             <a:endParaRPr lang="es-ES"/>
           </a:p>
@@ -22073,7 +21472,7 @@
               <a:pPr>
                 <a:defRPr/>
               </a:pPr>
-              <a:t>17/07/2026</a:t>
+              <a:t>05/10/2026</a:t>
             </a:fld>
             <a:endParaRPr lang="es-ES"/>
           </a:p>
@@ -22421,7 +21820,7 @@
               <a:pPr>
                 <a:defRPr/>
               </a:pPr>
-              <a:t>17/07/2026</a:t>
+              <a:t>05/10/2026</a:t>
             </a:fld>
             <a:endParaRPr lang="es-ES"/>
           </a:p>
@@ -22748,7 +22147,7 @@
               <a:pPr>
                 <a:defRPr/>
               </a:pPr>
-              <a:t>17/07/2026</a:t>
+              <a:t>05/10/2026</a:t>
             </a:fld>
             <a:endParaRPr lang="es-ES"/>
           </a:p>
@@ -22989,7 +22388,7 @@
               <a:pPr>
                 <a:defRPr/>
               </a:pPr>
-              <a:t>17/07/2026</a:t>
+              <a:t>05/10/2026</a:t>
             </a:fld>
             <a:endParaRPr lang="es-ES"/>
           </a:p>
@@ -23240,7 +22639,7 @@
               <a:pPr>
                 <a:defRPr/>
               </a:pPr>
-              <a:t>17/07/2026</a:t>
+              <a:t>05/10/2026</a:t>
             </a:fld>
             <a:endParaRPr lang="es-ES"/>
           </a:p>
@@ -23852,7 +23251,7 @@
               <a:pPr>
                 <a:defRPr/>
               </a:pPr>
-              <a:t>17/07/2026</a:t>
+              <a:t>05/10/2026</a:t>
             </a:fld>
             <a:endParaRPr lang="es-ES" dirty="0"/>
           </a:p>
@@ -24276,7 +23675,7 @@
               <a:pPr>
                 <a:defRPr/>
               </a:pPr>
-              <a:t>17/07/2026</a:t>
+              <a:t>05/10/2026</a:t>
             </a:fld>
             <a:endParaRPr lang="es-ES"/>
           </a:p>
@@ -24612,7 +24011,7 @@
               <a:pPr>
                 <a:defRPr/>
               </a:pPr>
-              <a:t>17/07/2026</a:t>
+              <a:t>05/10/2026</a:t>
             </a:fld>
             <a:endParaRPr lang="es-ES"/>
           </a:p>
@@ -25358,7 +24757,7 @@
               <a:pPr>
                 <a:defRPr/>
               </a:pPr>
-              <a:t>17/07/2026</a:t>
+              <a:t>05/10/2026</a:t>
             </a:fld>
             <a:endParaRPr lang="es-MX"/>
           </a:p>
@@ -26064,7 +25463,7 @@
               <a:pPr>
                 <a:defRPr/>
               </a:pPr>
-              <a:t>17/07/2026</a:t>
+              <a:t>05/10/2026</a:t>
             </a:fld>
             <a:endParaRPr lang="es-ES"/>
           </a:p>
@@ -26878,7 +26277,7 @@
               <a:pPr>
                 <a:defRPr/>
               </a:pPr>
-              <a:t>17/07/2026</a:t>
+              <a:t>05/10/2026</a:t>
             </a:fld>
             <a:endParaRPr lang="es-ES"/>
           </a:p>
@@ -27692,7 +27091,7 @@
               <a:pPr>
                 <a:defRPr/>
               </a:pPr>
-              <a:t>17/07/2026</a:t>
+              <a:t>05/10/2026</a:t>
             </a:fld>
             <a:endParaRPr lang="es-ES"/>
           </a:p>
@@ -33835,7 +33234,7 @@
           <p:nvPr>
             <p:extLst>
               <p:ext uri="{D42A27DB-BD31-4B8C-83A1-F6EECF244321}">
-                <p14:modId xmlns:p14="http://schemas.microsoft.com/office/powerpoint/2010/main" val="1395734800"/>
+                <p14:modId xmlns:p14="http://schemas.microsoft.com/office/powerpoint/2010/main" val="2171636746"/>
               </p:ext>
             </p:extLst>
           </p:nvPr>
@@ -33865,7 +33264,7 @@
           <p:nvPr>
             <p:extLst>
               <p:ext uri="{D42A27DB-BD31-4B8C-83A1-F6EECF244321}">
-                <p14:modId xmlns:p14="http://schemas.microsoft.com/office/powerpoint/2010/main" val="4083796757"/>
+                <p14:modId xmlns:p14="http://schemas.microsoft.com/office/powerpoint/2010/main" val="3985105726"/>
               </p:ext>
             </p:extLst>
           </p:nvPr>
@@ -34632,15 +34031,6 @@
                       <a:pPr algn="ctr" fontAlgn="b">
                         <a:buNone/>
                       </a:pPr>
-                      <a:r>
-                        <a:rPr lang="es-MX" sz="1000" b="1" dirty="0">
-                          <a:solidFill>
-                            <a:schemeClr val="tx1"/>
-                          </a:solidFill>
-                          <a:latin typeface="Montserrat" panose="00000500000000000000" pitchFamily="2" charset="0"/>
-                        </a:rPr>
-                        <a:t>76,679</a:t>
-                      </a:r>
                       <a:endParaRPr lang="es-MX" sz="1000" b="1" i="0" u="none" strike="noStrike" dirty="0">
                         <a:solidFill>
                           <a:schemeClr val="tx1"/>
@@ -34718,15 +34108,6 @@
                       <a:pPr algn="ctr" fontAlgn="b">
                         <a:buNone/>
                       </a:pPr>
-                      <a:r>
-                        <a:rPr lang="es-MX" sz="1000" b="1" dirty="0">
-                          <a:solidFill>
-                            <a:schemeClr val="tx1"/>
-                          </a:solidFill>
-                          <a:latin typeface="Montserrat" panose="00000500000000000000" pitchFamily="2" charset="0"/>
-                        </a:rPr>
-                        <a:t>70.2%</a:t>
-                      </a:r>
                       <a:endParaRPr lang="es-MX" sz="1000" b="1" i="0" u="none" strike="noStrike" dirty="0">
                         <a:solidFill>
                           <a:schemeClr val="tx1"/>
@@ -34818,20 +34199,17 @@
                         <a:tabLst/>
                         <a:defRPr/>
                       </a:pPr>
-                      <a:r>
-                        <a:rPr kumimoji="0" lang="es-MX" altLang="es-MX" sz="1000" b="1" i="0" u="none" strike="noStrike" cap="none" normalizeH="0" baseline="0" dirty="0">
-                          <a:ln>
-                            <a:noFill/>
-                          </a:ln>
-                          <a:solidFill>
-                            <a:schemeClr val="tx1"/>
-                          </a:solidFill>
-                          <a:effectLst/>
-                          <a:latin typeface="Montserrat" panose="00000500000000000000" pitchFamily="2" charset="0"/>
-                          <a:cs typeface="Arial" panose="020B0604020202020204" pitchFamily="34" charset="0"/>
-                        </a:rPr>
-                        <a:t>68.5%</a:t>
-                      </a:r>
+                      <a:endParaRPr kumimoji="0" lang="es-MX" altLang="es-MX" sz="1000" b="1" i="0" u="none" strike="noStrike" cap="none" normalizeH="0" baseline="0" dirty="0">
+                        <a:ln>
+                          <a:noFill/>
+                        </a:ln>
+                        <a:solidFill>
+                          <a:schemeClr val="tx1"/>
+                        </a:solidFill>
+                        <a:effectLst/>
+                        <a:latin typeface="Montserrat" panose="00000500000000000000" pitchFamily="2" charset="0"/>
+                        <a:cs typeface="Arial" panose="020B0604020202020204" pitchFamily="34" charset="0"/>
+                      </a:endParaRPr>
                     </a:p>
                   </a:txBody>
                   <a:tcPr marL="7651" marR="7651" marT="7651" marB="0" anchor="ctr">
@@ -34902,26 +34280,6 @@
                       <a:pPr algn="ctr" fontAlgn="b">
                         <a:buNone/>
                       </a:pPr>
-                      <a:r>
-                        <a:rPr lang="es-MX" sz="1000" b="1" i="0" u="none" strike="noStrike" dirty="0">
-                          <a:solidFill>
-                            <a:srgbClr val="00B050"/>
-                          </a:solidFill>
-                          <a:effectLst/>
-                          <a:latin typeface="Montserrat" panose="00000500000000000000" pitchFamily="2" charset="0"/>
-                        </a:rPr>
-                        <a:t>1.7 </a:t>
-                      </a:r>
-                      <a:r>
-                        <a:rPr lang="es-MX" sz="1000" b="1" i="0" u="none" strike="noStrike" dirty="0" err="1">
-                          <a:solidFill>
-                            <a:srgbClr val="00B050"/>
-                          </a:solidFill>
-                          <a:effectLst/>
-                          <a:latin typeface="Montserrat" panose="00000500000000000000" pitchFamily="2" charset="0"/>
-                        </a:rPr>
-                        <a:t>pp</a:t>
-                      </a:r>
                       <a:endParaRPr lang="es-MX" sz="1000" b="1" i="0" u="none" strike="noStrike" dirty="0">
                         <a:solidFill>
                           <a:srgbClr val="00B050"/>
@@ -35006,13 +34364,10 @@
                       <a:pPr algn="ctr" fontAlgn="b">
                         <a:buNone/>
                       </a:pPr>
-                      <a:r>
-                        <a:rPr lang="es-MX" sz="1000" b="0" i="0" u="none" strike="noStrike" dirty="0">
-                          <a:effectLst/>
-                          <a:latin typeface="Montserrat" panose="00000500000000000000" pitchFamily="2" charset="0"/>
-                        </a:rPr>
-                        <a:t>60,538</a:t>
-                      </a:r>
+                      <a:endParaRPr lang="es-MX" sz="1000" b="0" i="0" u="none" strike="noStrike" dirty="0">
+                        <a:effectLst/>
+                        <a:latin typeface="Montserrat" panose="00000500000000000000" pitchFamily="2" charset="0"/>
+                      </a:endParaRPr>
                     </a:p>
                   </a:txBody>
                   <a:tcPr marL="7651" marR="7651" marT="7651" marB="0" anchor="ctr">
@@ -35078,13 +34433,10 @@
                       <a:pPr algn="ctr" fontAlgn="b">
                         <a:buNone/>
                       </a:pPr>
-                      <a:r>
-                        <a:rPr lang="es-MX" sz="1000" b="1" i="0" u="none" strike="noStrike" dirty="0">
-                          <a:effectLst/>
-                          <a:latin typeface="Montserrat" panose="00000500000000000000" pitchFamily="2" charset="0"/>
-                        </a:rPr>
-                        <a:t>71.6%</a:t>
-                      </a:r>
+                      <a:endParaRPr lang="es-MX" sz="1000" b="1" i="0" u="none" strike="noStrike" dirty="0">
+                        <a:effectLst/>
+                        <a:latin typeface="Montserrat" panose="00000500000000000000" pitchFamily="2" charset="0"/>
+                      </a:endParaRPr>
                     </a:p>
                   </a:txBody>
                   <a:tcPr marL="7651" marR="7651" marT="7651" marB="0" anchor="ctr">
@@ -35153,13 +34505,10 @@
                       <a:pPr algn="ctr" fontAlgn="b">
                         <a:buNone/>
                       </a:pPr>
-                      <a:r>
-                        <a:rPr lang="es-MX" sz="1000" b="0" i="0" u="none" strike="noStrike" dirty="0">
-                          <a:effectLst/>
-                          <a:latin typeface="Montserrat" panose="00000500000000000000" pitchFamily="2" charset="0"/>
-                        </a:rPr>
-                        <a:t>69.3%</a:t>
-                      </a:r>
+                      <a:endParaRPr lang="es-MX" sz="1000" b="0" i="0" u="none" strike="noStrike" dirty="0">
+                        <a:effectLst/>
+                        <a:latin typeface="Montserrat" panose="00000500000000000000" pitchFamily="2" charset="0"/>
+                      </a:endParaRPr>
                     </a:p>
                   </a:txBody>
                   <a:tcPr marL="7651" marR="7651" marT="7651" marB="0" anchor="ctr">
@@ -35226,26 +34575,6 @@
                       <a:pPr algn="ctr" fontAlgn="b">
                         <a:buNone/>
                       </a:pPr>
-                      <a:r>
-                        <a:rPr lang="es-MX" sz="1000" b="0" i="0" u="none" strike="noStrike" dirty="0">
-                          <a:solidFill>
-                            <a:srgbClr val="00B050"/>
-                          </a:solidFill>
-                          <a:effectLst/>
-                          <a:latin typeface="Montserrat" panose="00000500000000000000" pitchFamily="2" charset="0"/>
-                        </a:rPr>
-                        <a:t>2.3 </a:t>
-                      </a:r>
-                      <a:r>
-                        <a:rPr lang="es-MX" sz="1000" b="0" i="0" u="none" strike="noStrike" dirty="0" err="1">
-                          <a:solidFill>
-                            <a:srgbClr val="00B050"/>
-                          </a:solidFill>
-                          <a:effectLst/>
-                          <a:latin typeface="Montserrat" panose="00000500000000000000" pitchFamily="2" charset="0"/>
-                        </a:rPr>
-                        <a:t>pp</a:t>
-                      </a:r>
                       <a:endParaRPr lang="es-MX" sz="1000" b="0" i="0" u="none" strike="noStrike" dirty="0">
                         <a:solidFill>
                           <a:srgbClr val="00B050"/>
@@ -35326,13 +34655,10 @@
                       <a:pPr algn="ctr" fontAlgn="b">
                         <a:buNone/>
                       </a:pPr>
-                      <a:r>
-                        <a:rPr lang="es-MX" sz="1000" b="0" i="0" u="none" strike="noStrike" dirty="0">
-                          <a:effectLst/>
-                          <a:latin typeface="Montserrat" panose="00000500000000000000" pitchFamily="2" charset="0"/>
-                        </a:rPr>
-                        <a:t>7,074</a:t>
-                      </a:r>
+                      <a:endParaRPr lang="es-MX" sz="1000" b="0" i="0" u="none" strike="noStrike" dirty="0">
+                        <a:effectLst/>
+                        <a:latin typeface="Montserrat" panose="00000500000000000000" pitchFamily="2" charset="0"/>
+                      </a:endParaRPr>
                     </a:p>
                   </a:txBody>
                   <a:tcPr marL="7651" marR="7651" marT="7651" marB="0" anchor="ctr">
@@ -35398,13 +34724,10 @@
                       <a:pPr algn="ctr" fontAlgn="b">
                         <a:buNone/>
                       </a:pPr>
-                      <a:r>
-                        <a:rPr lang="es-MX" sz="1000" b="1" i="0" u="none" strike="noStrike" dirty="0">
-                          <a:effectLst/>
-                          <a:latin typeface="Montserrat" panose="00000500000000000000" pitchFamily="2" charset="0"/>
-                        </a:rPr>
-                        <a:t>68.8%</a:t>
-                      </a:r>
+                      <a:endParaRPr lang="es-MX" sz="1000" b="1" i="0" u="none" strike="noStrike" dirty="0">
+                        <a:effectLst/>
+                        <a:latin typeface="Montserrat" panose="00000500000000000000" pitchFamily="2" charset="0"/>
+                      </a:endParaRPr>
                     </a:p>
                   </a:txBody>
                   <a:tcPr marL="7651" marR="7651" marT="7651" marB="0" anchor="ctr">
@@ -35473,13 +34796,10 @@
                       <a:pPr algn="ctr" fontAlgn="b">
                         <a:buNone/>
                       </a:pPr>
-                      <a:r>
-                        <a:rPr lang="es-MX" sz="1000" b="0" i="0" u="none" strike="noStrike" dirty="0">
-                          <a:effectLst/>
-                          <a:latin typeface="Montserrat" panose="00000500000000000000" pitchFamily="2" charset="0"/>
-                        </a:rPr>
-                        <a:t>69.7%</a:t>
-                      </a:r>
+                      <a:endParaRPr lang="es-MX" sz="1000" b="0" i="0" u="none" strike="noStrike" dirty="0">
+                        <a:effectLst/>
+                        <a:latin typeface="Montserrat" panose="00000500000000000000" pitchFamily="2" charset="0"/>
+                      </a:endParaRPr>
                     </a:p>
                   </a:txBody>
                   <a:tcPr marL="7651" marR="7651" marT="7651" marB="0" anchor="ctr">
@@ -35546,26 +34866,6 @@
                       <a:pPr algn="ctr" fontAlgn="b">
                         <a:buNone/>
                       </a:pPr>
-                      <a:r>
-                        <a:rPr lang="es-MX" sz="1000" b="0" i="0" u="none" strike="noStrike" dirty="0">
-                          <a:solidFill>
-                            <a:srgbClr val="FF0000"/>
-                          </a:solidFill>
-                          <a:effectLst/>
-                          <a:latin typeface="Montserrat" panose="00000500000000000000" pitchFamily="2" charset="0"/>
-                        </a:rPr>
-                        <a:t>-0.9 </a:t>
-                      </a:r>
-                      <a:r>
-                        <a:rPr lang="es-MX" sz="1000" b="0" i="0" u="none" strike="noStrike" dirty="0" err="1">
-                          <a:solidFill>
-                            <a:srgbClr val="FF0000"/>
-                          </a:solidFill>
-                          <a:effectLst/>
-                          <a:latin typeface="Montserrat" panose="00000500000000000000" pitchFamily="2" charset="0"/>
-                        </a:rPr>
-                        <a:t>pp</a:t>
-                      </a:r>
                       <a:endParaRPr lang="es-MX" sz="1000" b="0" i="0" u="none" strike="noStrike" dirty="0">
                         <a:solidFill>
                           <a:srgbClr val="FF0000"/>
@@ -35646,13 +34946,10 @@
                       <a:pPr algn="ctr" fontAlgn="b">
                         <a:buNone/>
                       </a:pPr>
-                      <a:r>
-                        <a:rPr lang="es-MX" sz="1000" b="0" i="0" u="none" strike="noStrike" dirty="0">
-                          <a:effectLst/>
-                          <a:latin typeface="Montserrat" panose="00000500000000000000" pitchFamily="2" charset="0"/>
-                        </a:rPr>
-                        <a:t>4,385</a:t>
-                      </a:r>
+                      <a:endParaRPr lang="es-MX" sz="1000" b="0" i="0" u="none" strike="noStrike" dirty="0">
+                        <a:effectLst/>
+                        <a:latin typeface="Montserrat" panose="00000500000000000000" pitchFamily="2" charset="0"/>
+                      </a:endParaRPr>
                     </a:p>
                   </a:txBody>
                   <a:tcPr marL="7651" marR="7651" marT="7651" marB="0" anchor="ctr">
@@ -35718,13 +35015,10 @@
                       <a:pPr algn="ctr" fontAlgn="b">
                         <a:buNone/>
                       </a:pPr>
-                      <a:r>
-                        <a:rPr lang="es-MX" sz="1000" b="1" i="0" u="none" strike="noStrike" dirty="0">
-                          <a:effectLst/>
-                          <a:latin typeface="Montserrat" panose="00000500000000000000" pitchFamily="2" charset="0"/>
-                        </a:rPr>
-                        <a:t>59.5%</a:t>
-                      </a:r>
+                      <a:endParaRPr lang="es-MX" sz="1000" b="1" i="0" u="none" strike="noStrike" dirty="0">
+                        <a:effectLst/>
+                        <a:latin typeface="Montserrat" panose="00000500000000000000" pitchFamily="2" charset="0"/>
+                      </a:endParaRPr>
                     </a:p>
                   </a:txBody>
                   <a:tcPr marL="7651" marR="7651" marT="7651" marB="0" anchor="ctr">
@@ -35793,13 +35087,10 @@
                       <a:pPr algn="ctr" fontAlgn="b">
                         <a:buNone/>
                       </a:pPr>
-                      <a:r>
-                        <a:rPr lang="es-MX" sz="1000" b="0" i="0" u="none" strike="noStrike" dirty="0">
-                          <a:effectLst/>
-                          <a:latin typeface="Montserrat" panose="00000500000000000000" pitchFamily="2" charset="0"/>
-                        </a:rPr>
-                        <a:t>61.0%</a:t>
-                      </a:r>
+                      <a:endParaRPr lang="es-MX" sz="1000" b="0" i="0" u="none" strike="noStrike" dirty="0">
+                        <a:effectLst/>
+                        <a:latin typeface="Montserrat" panose="00000500000000000000" pitchFamily="2" charset="0"/>
+                      </a:endParaRPr>
                     </a:p>
                   </a:txBody>
                   <a:tcPr marL="7651" marR="7651" marT="7651" marB="0" anchor="ctr">
@@ -35866,26 +35157,6 @@
                       <a:pPr algn="ctr" fontAlgn="b">
                         <a:buNone/>
                       </a:pPr>
-                      <a:r>
-                        <a:rPr lang="es-MX" sz="1000" b="0" i="0" u="none" strike="noStrike" dirty="0">
-                          <a:solidFill>
-                            <a:srgbClr val="FF0000"/>
-                          </a:solidFill>
-                          <a:effectLst/>
-                          <a:latin typeface="Montserrat" panose="00000500000000000000" pitchFamily="2" charset="0"/>
-                        </a:rPr>
-                        <a:t>-1.5 </a:t>
-                      </a:r>
-                      <a:r>
-                        <a:rPr lang="es-MX" sz="1000" b="0" i="0" u="none" strike="noStrike" dirty="0" err="1">
-                          <a:solidFill>
-                            <a:srgbClr val="FF0000"/>
-                          </a:solidFill>
-                          <a:effectLst/>
-                          <a:latin typeface="Montserrat" panose="00000500000000000000" pitchFamily="2" charset="0"/>
-                        </a:rPr>
-                        <a:t>pp</a:t>
-                      </a:r>
                       <a:endParaRPr lang="es-MX" sz="1000" b="0" i="0" u="none" strike="noStrike" dirty="0">
                         <a:solidFill>
                           <a:srgbClr val="FF0000"/>
@@ -35966,13 +35237,10 @@
                       <a:pPr algn="ctr" fontAlgn="b">
                         <a:buNone/>
                       </a:pPr>
-                      <a:r>
-                        <a:rPr lang="es-MX" sz="1000" b="0" i="0" u="none" strike="noStrike" dirty="0">
-                          <a:effectLst/>
-                          <a:latin typeface="Montserrat" panose="00000500000000000000" pitchFamily="2" charset="0"/>
-                        </a:rPr>
-                        <a:t>2,651</a:t>
-                      </a:r>
+                      <a:endParaRPr lang="es-MX" sz="1000" b="0" i="0" u="none" strike="noStrike" dirty="0">
+                        <a:effectLst/>
+                        <a:latin typeface="Montserrat" panose="00000500000000000000" pitchFamily="2" charset="0"/>
+                      </a:endParaRPr>
                     </a:p>
                   </a:txBody>
                   <a:tcPr marL="7651" marR="7651" marT="7651" marB="0" anchor="ctr">
@@ -36038,13 +35306,10 @@
                       <a:pPr algn="ctr" fontAlgn="b">
                         <a:buNone/>
                       </a:pPr>
-                      <a:r>
-                        <a:rPr lang="es-MX" sz="1000" b="1" i="0" u="none" strike="noStrike" dirty="0">
-                          <a:effectLst/>
-                          <a:latin typeface="Montserrat" panose="00000500000000000000" pitchFamily="2" charset="0"/>
-                        </a:rPr>
-                        <a:t>64.8%</a:t>
-                      </a:r>
+                      <a:endParaRPr lang="es-MX" sz="1000" b="1" i="0" u="none" strike="noStrike" dirty="0">
+                        <a:effectLst/>
+                        <a:latin typeface="Montserrat" panose="00000500000000000000" pitchFamily="2" charset="0"/>
+                      </a:endParaRPr>
                     </a:p>
                   </a:txBody>
                   <a:tcPr marL="7651" marR="7651" marT="7651" marB="0" anchor="ctr">
@@ -36113,13 +35378,10 @@
                       <a:pPr algn="ctr" fontAlgn="b">
                         <a:buNone/>
                       </a:pPr>
-                      <a:r>
-                        <a:rPr lang="es-MX" sz="1000" b="0" i="0" u="none" strike="noStrike" dirty="0">
-                          <a:effectLst/>
-                          <a:latin typeface="Montserrat" panose="00000500000000000000" pitchFamily="2" charset="0"/>
-                        </a:rPr>
-                        <a:t>62.7%</a:t>
-                      </a:r>
+                      <a:endParaRPr lang="es-MX" sz="1000" b="0" i="0" u="none" strike="noStrike" dirty="0">
+                        <a:effectLst/>
+                        <a:latin typeface="Montserrat" panose="00000500000000000000" pitchFamily="2" charset="0"/>
+                      </a:endParaRPr>
                     </a:p>
                   </a:txBody>
                   <a:tcPr marL="7651" marR="7651" marT="7651" marB="0" anchor="ctr">
@@ -36186,26 +35448,6 @@
                       <a:pPr algn="ctr" fontAlgn="b">
                         <a:buNone/>
                       </a:pPr>
-                      <a:r>
-                        <a:rPr lang="es-MX" sz="1000" b="0" i="0" u="none" strike="noStrike" dirty="0">
-                          <a:solidFill>
-                            <a:srgbClr val="00B050"/>
-                          </a:solidFill>
-                          <a:effectLst/>
-                          <a:latin typeface="Montserrat" panose="00000500000000000000" pitchFamily="2" charset="0"/>
-                        </a:rPr>
-                        <a:t>2.1 </a:t>
-                      </a:r>
-                      <a:r>
-                        <a:rPr lang="es-MX" sz="1000" b="0" i="0" u="none" strike="noStrike" dirty="0" err="1">
-                          <a:solidFill>
-                            <a:srgbClr val="00B050"/>
-                          </a:solidFill>
-                          <a:effectLst/>
-                          <a:latin typeface="Montserrat" panose="00000500000000000000" pitchFamily="2" charset="0"/>
-                        </a:rPr>
-                        <a:t>pp</a:t>
-                      </a:r>
                       <a:endParaRPr lang="es-MX" sz="1000" b="0" i="0" u="none" strike="noStrike" dirty="0">
                         <a:solidFill>
                           <a:srgbClr val="00B050"/>
@@ -36286,13 +35528,10 @@
                       <a:pPr algn="ctr" fontAlgn="b">
                         <a:buNone/>
                       </a:pPr>
-                      <a:r>
-                        <a:rPr lang="es-MX" sz="1000" b="0" i="0" u="none" strike="noStrike" dirty="0">
-                          <a:effectLst/>
-                          <a:latin typeface="Montserrat" panose="00000500000000000000" pitchFamily="2" charset="0"/>
-                        </a:rPr>
-                        <a:t>1,008</a:t>
-                      </a:r>
+                      <a:endParaRPr lang="es-MX" sz="1000" b="0" i="0" u="none" strike="noStrike" dirty="0">
+                        <a:effectLst/>
+                        <a:latin typeface="Montserrat" panose="00000500000000000000" pitchFamily="2" charset="0"/>
+                      </a:endParaRPr>
                     </a:p>
                   </a:txBody>
                   <a:tcPr marL="7651" marR="7651" marT="7651" marB="0" anchor="ctr">
@@ -36358,13 +35597,10 @@
                       <a:pPr algn="ctr" fontAlgn="b">
                         <a:buNone/>
                       </a:pPr>
-                      <a:r>
-                        <a:rPr lang="es-MX" sz="1000" b="1" i="0" u="none" strike="noStrike" dirty="0">
-                          <a:effectLst/>
-                          <a:latin typeface="Montserrat" panose="00000500000000000000" pitchFamily="2" charset="0"/>
-                        </a:rPr>
-                        <a:t>76.3%</a:t>
-                      </a:r>
+                      <a:endParaRPr lang="es-MX" sz="1000" b="1" i="0" u="none" strike="noStrike" dirty="0">
+                        <a:effectLst/>
+                        <a:latin typeface="Montserrat" panose="00000500000000000000" pitchFamily="2" charset="0"/>
+                      </a:endParaRPr>
                     </a:p>
                   </a:txBody>
                   <a:tcPr marL="7651" marR="7651" marT="7651" marB="0" anchor="ctr">
@@ -36433,13 +35669,10 @@
                       <a:pPr algn="ctr" fontAlgn="b">
                         <a:buNone/>
                       </a:pPr>
-                      <a:r>
-                        <a:rPr lang="es-MX" sz="1000" b="0" i="0" u="none" strike="noStrike" dirty="0">
-                          <a:effectLst/>
-                          <a:latin typeface="Montserrat" panose="00000500000000000000" pitchFamily="2" charset="0"/>
-                        </a:rPr>
-                        <a:t>76.8%</a:t>
-                      </a:r>
+                      <a:endParaRPr lang="es-MX" sz="1000" b="0" i="0" u="none" strike="noStrike" dirty="0">
+                        <a:effectLst/>
+                        <a:latin typeface="Montserrat" panose="00000500000000000000" pitchFamily="2" charset="0"/>
+                      </a:endParaRPr>
                     </a:p>
                   </a:txBody>
                   <a:tcPr marL="7651" marR="7651" marT="7651" marB="0" anchor="ctr">
@@ -36506,26 +35739,6 @@
                       <a:pPr algn="ctr" fontAlgn="b">
                         <a:buNone/>
                       </a:pPr>
-                      <a:r>
-                        <a:rPr lang="es-MX" sz="1000" b="0" i="0" u="none" strike="noStrike" dirty="0">
-                          <a:solidFill>
-                            <a:srgbClr val="FF0000"/>
-                          </a:solidFill>
-                          <a:effectLst/>
-                          <a:latin typeface="Montserrat" panose="00000500000000000000" pitchFamily="2" charset="0"/>
-                        </a:rPr>
-                        <a:t>-0.5 </a:t>
-                      </a:r>
-                      <a:r>
-                        <a:rPr lang="es-MX" sz="1000" b="0" i="0" u="none" strike="noStrike" dirty="0" err="1">
-                          <a:solidFill>
-                            <a:srgbClr val="FF0000"/>
-                          </a:solidFill>
-                          <a:effectLst/>
-                          <a:latin typeface="Montserrat" panose="00000500000000000000" pitchFamily="2" charset="0"/>
-                        </a:rPr>
-                        <a:t>pp</a:t>
-                      </a:r>
                       <a:endParaRPr lang="es-MX" sz="1000" b="0" i="0" u="none" strike="noStrike" dirty="0">
                         <a:solidFill>
                           <a:srgbClr val="FF0000"/>
@@ -36606,13 +35819,10 @@
                       <a:pPr algn="ctr" fontAlgn="b">
                         <a:buNone/>
                       </a:pPr>
-                      <a:r>
-                        <a:rPr lang="es-MX" sz="1000" b="0" i="0" u="none" strike="noStrike" dirty="0">
-                          <a:effectLst/>
-                          <a:latin typeface="Montserrat" panose="00000500000000000000" pitchFamily="2" charset="0"/>
-                        </a:rPr>
-                        <a:t>762</a:t>
-                      </a:r>
+                      <a:endParaRPr lang="es-MX" sz="1000" b="0" i="0" u="none" strike="noStrike" dirty="0">
+                        <a:effectLst/>
+                        <a:latin typeface="Montserrat" panose="00000500000000000000" pitchFamily="2" charset="0"/>
+                      </a:endParaRPr>
                     </a:p>
                   </a:txBody>
                   <a:tcPr marL="7651" marR="7651" marT="7651" marB="0" anchor="ctr">
@@ -36678,13 +35888,10 @@
                       <a:pPr algn="ctr" fontAlgn="b">
                         <a:buNone/>
                       </a:pPr>
-                      <a:r>
-                        <a:rPr lang="es-MX" sz="1000" b="1" i="0" u="none" strike="noStrike" dirty="0">
-                          <a:effectLst/>
-                          <a:latin typeface="Montserrat" panose="00000500000000000000" pitchFamily="2" charset="0"/>
-                        </a:rPr>
-                        <a:t>50.4%</a:t>
-                      </a:r>
+                      <a:endParaRPr lang="es-MX" sz="1000" b="1" i="0" u="none" strike="noStrike" dirty="0">
+                        <a:effectLst/>
+                        <a:latin typeface="Montserrat" panose="00000500000000000000" pitchFamily="2" charset="0"/>
+                      </a:endParaRPr>
                     </a:p>
                   </a:txBody>
                   <a:tcPr marL="7651" marR="7651" marT="7651" marB="0" anchor="ctr">
@@ -36753,13 +35960,10 @@
                       <a:pPr algn="ctr" fontAlgn="b">
                         <a:buNone/>
                       </a:pPr>
-                      <a:r>
-                        <a:rPr lang="es-MX" sz="1000" b="0" i="0" u="none" strike="noStrike" dirty="0">
-                          <a:effectLst/>
-                          <a:latin typeface="Montserrat" panose="00000500000000000000" pitchFamily="2" charset="0"/>
-                        </a:rPr>
-                        <a:t>51.8%</a:t>
-                      </a:r>
+                      <a:endParaRPr lang="es-MX" sz="1000" b="0" i="0" u="none" strike="noStrike" dirty="0">
+                        <a:effectLst/>
+                        <a:latin typeface="Montserrat" panose="00000500000000000000" pitchFamily="2" charset="0"/>
+                      </a:endParaRPr>
                     </a:p>
                   </a:txBody>
                   <a:tcPr marL="7651" marR="7651" marT="7651" marB="0" anchor="ctr">
@@ -36826,26 +36030,6 @@
                       <a:pPr algn="ctr" fontAlgn="b">
                         <a:buNone/>
                       </a:pPr>
-                      <a:r>
-                        <a:rPr lang="es-MX" sz="1000" b="0" i="0" u="none" strike="noStrike" dirty="0">
-                          <a:solidFill>
-                            <a:srgbClr val="FF0000"/>
-                          </a:solidFill>
-                          <a:effectLst/>
-                          <a:latin typeface="Montserrat" panose="00000500000000000000" pitchFamily="2" charset="0"/>
-                        </a:rPr>
-                        <a:t>-1.4 </a:t>
-                      </a:r>
-                      <a:r>
-                        <a:rPr lang="es-MX" sz="1000" b="0" i="0" u="none" strike="noStrike" dirty="0" err="1">
-                          <a:solidFill>
-                            <a:srgbClr val="FF0000"/>
-                          </a:solidFill>
-                          <a:effectLst/>
-                          <a:latin typeface="Montserrat" panose="00000500000000000000" pitchFamily="2" charset="0"/>
-                        </a:rPr>
-                        <a:t>pp</a:t>
-                      </a:r>
                       <a:endParaRPr lang="es-MX" sz="1000" b="0" i="0" u="none" strike="noStrike" dirty="0">
                         <a:solidFill>
                           <a:srgbClr val="FF0000"/>
@@ -36926,13 +36110,10 @@
                       <a:pPr algn="ctr" fontAlgn="b">
                         <a:buNone/>
                       </a:pPr>
-                      <a:r>
-                        <a:rPr lang="es-MX" sz="1000" b="0" i="0" u="none" strike="noStrike" dirty="0">
-                          <a:effectLst/>
-                          <a:latin typeface="Montserrat" panose="00000500000000000000" pitchFamily="2" charset="0"/>
-                        </a:rPr>
-                        <a:t>256</a:t>
-                      </a:r>
+                      <a:endParaRPr lang="es-MX" sz="1000" b="0" i="0" u="none" strike="noStrike" dirty="0">
+                        <a:effectLst/>
+                        <a:latin typeface="Montserrat" panose="00000500000000000000" pitchFamily="2" charset="0"/>
+                      </a:endParaRPr>
                     </a:p>
                   </a:txBody>
                   <a:tcPr marL="7651" marR="7651" marT="7651" marB="0" anchor="ctr">
@@ -36998,13 +36179,10 @@
                       <a:pPr algn="ctr" fontAlgn="b">
                         <a:buNone/>
                       </a:pPr>
-                      <a:r>
-                        <a:rPr lang="es-MX" sz="1000" b="1" i="0" u="none" strike="noStrike" dirty="0">
-                          <a:effectLst/>
-                          <a:latin typeface="Montserrat" panose="00000500000000000000" pitchFamily="2" charset="0"/>
-                        </a:rPr>
-                        <a:t>67.2%</a:t>
-                      </a:r>
+                      <a:endParaRPr lang="es-MX" sz="1000" b="1" i="0" u="none" strike="noStrike" dirty="0">
+                        <a:effectLst/>
+                        <a:latin typeface="Montserrat" panose="00000500000000000000" pitchFamily="2" charset="0"/>
+                      </a:endParaRPr>
                     </a:p>
                   </a:txBody>
                   <a:tcPr marL="7651" marR="7651" marT="7651" marB="0" anchor="ctr">
@@ -37073,13 +36251,10 @@
                       <a:pPr algn="ctr" fontAlgn="b">
                         <a:buNone/>
                       </a:pPr>
-                      <a:r>
-                        <a:rPr lang="es-MX" sz="1000" b="0" i="0" u="none" strike="noStrike" dirty="0">
-                          <a:effectLst/>
-                          <a:latin typeface="Montserrat" panose="00000500000000000000" pitchFamily="2" charset="0"/>
-                        </a:rPr>
-                        <a:t>65.0%</a:t>
-                      </a:r>
+                      <a:endParaRPr lang="es-MX" sz="1000" b="0" i="0" u="none" strike="noStrike" dirty="0">
+                        <a:effectLst/>
+                        <a:latin typeface="Montserrat" panose="00000500000000000000" pitchFamily="2" charset="0"/>
+                      </a:endParaRPr>
                     </a:p>
                   </a:txBody>
                   <a:tcPr marL="7651" marR="7651" marT="7651" marB="0" anchor="ctr">
@@ -37146,26 +36321,6 @@
                       <a:pPr algn="ctr" fontAlgn="b">
                         <a:buNone/>
                       </a:pPr>
-                      <a:r>
-                        <a:rPr lang="es-MX" sz="1000" b="0" i="0" u="none" strike="noStrike" dirty="0">
-                          <a:solidFill>
-                            <a:srgbClr val="00B050"/>
-                          </a:solidFill>
-                          <a:effectLst/>
-                          <a:latin typeface="Montserrat" panose="00000500000000000000" pitchFamily="2" charset="0"/>
-                        </a:rPr>
-                        <a:t>2.2 </a:t>
-                      </a:r>
-                      <a:r>
-                        <a:rPr lang="es-MX" sz="1000" b="0" i="0" u="none" strike="noStrike" dirty="0" err="1">
-                          <a:solidFill>
-                            <a:srgbClr val="00B050"/>
-                          </a:solidFill>
-                          <a:effectLst/>
-                          <a:latin typeface="Montserrat" panose="00000500000000000000" pitchFamily="2" charset="0"/>
-                        </a:rPr>
-                        <a:t>pp</a:t>
-                      </a:r>
                       <a:endParaRPr lang="es-MX" sz="1000" b="0" i="0" u="none" strike="noStrike" dirty="0">
                         <a:solidFill>
                           <a:srgbClr val="00B050"/>
@@ -37246,13 +36401,10 @@
                       <a:pPr algn="ctr" fontAlgn="b">
                         <a:buNone/>
                       </a:pPr>
-                      <a:r>
-                        <a:rPr lang="es-MX" sz="1000" b="0" i="0" u="none" strike="noStrike" dirty="0">
-                          <a:effectLst/>
-                          <a:latin typeface="Montserrat" panose="00000500000000000000" pitchFamily="2" charset="0"/>
-                        </a:rPr>
-                        <a:t>15</a:t>
-                      </a:r>
+                      <a:endParaRPr lang="es-MX" sz="1000" b="0" i="0" u="none" strike="noStrike" dirty="0">
+                        <a:effectLst/>
+                        <a:latin typeface="Montserrat" panose="00000500000000000000" pitchFamily="2" charset="0"/>
+                      </a:endParaRPr>
                     </a:p>
                   </a:txBody>
                   <a:tcPr marL="7651" marR="7651" marT="7651" marB="0" anchor="ctr">
@@ -37318,13 +36470,10 @@
                       <a:pPr algn="ctr" fontAlgn="b">
                         <a:buNone/>
                       </a:pPr>
-                      <a:r>
-                        <a:rPr lang="es-MX" sz="1000" b="1" i="0" u="none" strike="noStrike" dirty="0">
-                          <a:effectLst/>
-                          <a:latin typeface="Montserrat" panose="00000500000000000000" pitchFamily="2" charset="0"/>
-                        </a:rPr>
-                        <a:t>73.3%</a:t>
-                      </a:r>
+                      <a:endParaRPr lang="es-MX" sz="1000" b="1" i="0" u="none" strike="noStrike" dirty="0">
+                        <a:effectLst/>
+                        <a:latin typeface="Montserrat" panose="00000500000000000000" pitchFamily="2" charset="0"/>
+                      </a:endParaRPr>
                     </a:p>
                   </a:txBody>
                   <a:tcPr marL="7651" marR="7651" marT="7651" marB="0" anchor="ctr">
@@ -37393,13 +36542,10 @@
                       <a:pPr algn="ctr" fontAlgn="b">
                         <a:buNone/>
                       </a:pPr>
-                      <a:r>
-                        <a:rPr lang="es-MX" sz="1000" b="0" i="0" u="none" strike="noStrike" dirty="0">
-                          <a:effectLst/>
-                          <a:latin typeface="Montserrat" panose="00000500000000000000" pitchFamily="2" charset="0"/>
-                        </a:rPr>
-                        <a:t>47.1%</a:t>
-                      </a:r>
+                      <a:endParaRPr lang="es-MX" sz="1000" b="0" i="0" u="none" strike="noStrike" dirty="0">
+                        <a:effectLst/>
+                        <a:latin typeface="Montserrat" panose="00000500000000000000" pitchFamily="2" charset="0"/>
+                      </a:endParaRPr>
                     </a:p>
                   </a:txBody>
                   <a:tcPr marL="7651" marR="7651" marT="7651" marB="0" anchor="ctr">
@@ -37466,26 +36612,6 @@
                       <a:pPr algn="ctr" fontAlgn="b">
                         <a:buNone/>
                       </a:pPr>
-                      <a:r>
-                        <a:rPr lang="es-MX" sz="1000" b="0" i="0" u="none" strike="noStrike" dirty="0">
-                          <a:solidFill>
-                            <a:srgbClr val="00B050"/>
-                          </a:solidFill>
-                          <a:effectLst/>
-                          <a:latin typeface="Montserrat" panose="00000500000000000000" pitchFamily="2" charset="0"/>
-                        </a:rPr>
-                        <a:t>26.2 </a:t>
-                      </a:r>
-                      <a:r>
-                        <a:rPr lang="es-MX" sz="1000" b="0" i="0" u="none" strike="noStrike" dirty="0" err="1">
-                          <a:solidFill>
-                            <a:srgbClr val="00B050"/>
-                          </a:solidFill>
-                          <a:effectLst/>
-                          <a:latin typeface="Montserrat" panose="00000500000000000000" pitchFamily="2" charset="0"/>
-                        </a:rPr>
-                        <a:t>pp</a:t>
-                      </a:r>
                       <a:endParaRPr lang="es-MX" sz="1000" b="0" i="0" u="none" strike="noStrike" dirty="0">
                         <a:solidFill>
                           <a:srgbClr val="00B050"/>
@@ -37566,13 +36692,10 @@
                       <a:pPr algn="ctr" fontAlgn="b">
                         <a:buNone/>
                       </a:pPr>
-                      <a:r>
-                        <a:rPr lang="es-MX" sz="1000" b="0" i="0" u="none" strike="noStrike" dirty="0">
-                          <a:effectLst/>
-                          <a:latin typeface="Montserrat" panose="00000500000000000000" pitchFamily="2" charset="0"/>
-                        </a:rPr>
-                        <a:t>14</a:t>
-                      </a:r>
+                      <a:endParaRPr lang="es-MX" sz="1000" b="0" i="0" u="none" strike="noStrike" dirty="0">
+                        <a:effectLst/>
+                        <a:latin typeface="Montserrat" panose="00000500000000000000" pitchFamily="2" charset="0"/>
+                      </a:endParaRPr>
                     </a:p>
                   </a:txBody>
                   <a:tcPr marL="7651" marR="7651" marT="7651" marB="0" anchor="ctr">
@@ -37638,13 +36761,10 @@
                       <a:pPr algn="ctr" fontAlgn="b">
                         <a:buNone/>
                       </a:pPr>
-                      <a:r>
-                        <a:rPr lang="es-MX" sz="1000" b="1" i="0" u="none" strike="noStrike" dirty="0">
-                          <a:effectLst/>
-                          <a:latin typeface="Montserrat" panose="00000500000000000000" pitchFamily="2" charset="0"/>
-                        </a:rPr>
-                        <a:t>100.0%</a:t>
-                      </a:r>
+                      <a:endParaRPr lang="es-MX" sz="1000" b="1" i="0" u="none" strike="noStrike" dirty="0">
+                        <a:effectLst/>
+                        <a:latin typeface="Montserrat" panose="00000500000000000000" pitchFamily="2" charset="0"/>
+                      </a:endParaRPr>
                     </a:p>
                   </a:txBody>
                   <a:tcPr marL="7651" marR="7651" marT="7651" marB="0" anchor="ctr">
@@ -37715,13 +36835,10 @@
                       <a:pPr algn="ctr" fontAlgn="b">
                         <a:buNone/>
                       </a:pPr>
-                      <a:r>
-                        <a:rPr lang="es-MX" sz="1000" b="0" i="0" u="none" strike="noStrike" dirty="0">
-                          <a:effectLst/>
-                          <a:latin typeface="Montserrat" panose="00000500000000000000" pitchFamily="2" charset="0"/>
-                        </a:rPr>
-                        <a:t>90.0%</a:t>
-                      </a:r>
+                      <a:endParaRPr lang="es-MX" sz="1000" b="0" i="0" u="none" strike="noStrike" dirty="0">
+                        <a:effectLst/>
+                        <a:latin typeface="Montserrat" panose="00000500000000000000" pitchFamily="2" charset="0"/>
+                      </a:endParaRPr>
                     </a:p>
                   </a:txBody>
                   <a:tcPr marL="7651" marR="7651" marT="7651" marB="0" anchor="ctr">
@@ -37788,26 +36905,6 @@
                       <a:pPr algn="ctr" fontAlgn="b">
                         <a:buNone/>
                       </a:pPr>
-                      <a:r>
-                        <a:rPr lang="es-MX" sz="1000" b="0" i="0" u="none" strike="noStrike" dirty="0">
-                          <a:solidFill>
-                            <a:srgbClr val="00B050"/>
-                          </a:solidFill>
-                          <a:effectLst/>
-                          <a:latin typeface="Montserrat" panose="00000500000000000000" pitchFamily="2" charset="0"/>
-                        </a:rPr>
-                        <a:t>10.0 </a:t>
-                      </a:r>
-                      <a:r>
-                        <a:rPr lang="es-MX" sz="1000" b="0" i="0" u="none" strike="noStrike" dirty="0" err="1">
-                          <a:solidFill>
-                            <a:srgbClr val="00B050"/>
-                          </a:solidFill>
-                          <a:effectLst/>
-                          <a:latin typeface="Montserrat" panose="00000500000000000000" pitchFamily="2" charset="0"/>
-                        </a:rPr>
-                        <a:t>pp</a:t>
-                      </a:r>
                       <a:endParaRPr lang="es-MX" sz="1000" b="0" i="0" u="none" strike="noStrike" dirty="0">
                         <a:solidFill>
                           <a:srgbClr val="00B050"/>
@@ -38199,7 +37296,7 @@
           <p:nvPr>
             <p:extLst>
               <p:ext uri="{D42A27DB-BD31-4B8C-83A1-F6EECF244321}">
-                <p14:modId xmlns:p14="http://schemas.microsoft.com/office/powerpoint/2010/main" val="415049238"/>
+                <p14:modId xmlns:p14="http://schemas.microsoft.com/office/powerpoint/2010/main" val="615912625"/>
               </p:ext>
             </p:extLst>
           </p:nvPr>
@@ -38290,7 +37387,7 @@
           <p:nvPr>
             <p:extLst>
               <p:ext uri="{D42A27DB-BD31-4B8C-83A1-F6EECF244321}">
-                <p14:modId xmlns:p14="http://schemas.microsoft.com/office/powerpoint/2010/main" val="2459032966"/>
+                <p14:modId xmlns:p14="http://schemas.microsoft.com/office/powerpoint/2010/main" val="931135176"/>
               </p:ext>
             </p:extLst>
           </p:nvPr>
@@ -39096,13 +38193,10 @@
                       <a:pPr algn="ctr" fontAlgn="b">
                         <a:buNone/>
                       </a:pPr>
-                      <a:r>
-                        <a:rPr lang="es-MX" sz="1000" b="1" i="0" u="none" strike="noStrike" dirty="0">
-                          <a:effectLst/>
-                          <a:latin typeface="Montserrat" panose="00000500000000000000" pitchFamily="2" charset="0"/>
-                        </a:rPr>
-                        <a:t>15</a:t>
-                      </a:r>
+                      <a:endParaRPr lang="es-MX" sz="1000" b="1" i="0" u="none" strike="noStrike" dirty="0">
+                        <a:effectLst/>
+                        <a:latin typeface="Montserrat" panose="00000500000000000000" pitchFamily="2" charset="0"/>
+                      </a:endParaRPr>
                     </a:p>
                   </a:txBody>
                   <a:tcPr marL="7620" marR="7620" marT="7620" marB="0" anchor="ctr">
@@ -39168,13 +38262,10 @@
                       <a:pPr algn="ctr" fontAlgn="b">
                         <a:buNone/>
                       </a:pPr>
-                      <a:r>
-                        <a:rPr lang="es-MX" sz="1000" b="1" i="0" u="none" strike="noStrike" dirty="0">
-                          <a:effectLst/>
-                          <a:latin typeface="Montserrat" panose="00000500000000000000" pitchFamily="2" charset="0"/>
-                        </a:rPr>
-                        <a:t>73.3%</a:t>
-                      </a:r>
+                      <a:endParaRPr lang="es-MX" sz="1000" b="1" i="0" u="none" strike="noStrike" dirty="0">
+                        <a:effectLst/>
+                        <a:latin typeface="Montserrat" panose="00000500000000000000" pitchFamily="2" charset="0"/>
+                      </a:endParaRPr>
                     </a:p>
                   </a:txBody>
                   <a:tcPr marL="7620" marR="7620" marT="7620" marB="0" anchor="ctr">
@@ -39245,13 +38336,10 @@
                       <a:pPr algn="ctr" fontAlgn="b">
                         <a:buNone/>
                       </a:pPr>
-                      <a:r>
-                        <a:rPr lang="es-MX" sz="1000" b="1" i="0" u="none" strike="noStrike" dirty="0">
-                          <a:effectLst/>
-                          <a:latin typeface="Montserrat" panose="00000500000000000000" pitchFamily="2" charset="0"/>
-                        </a:rPr>
-                        <a:t>47.1%</a:t>
-                      </a:r>
+                      <a:endParaRPr lang="es-MX" sz="1000" b="1" i="0" u="none" strike="noStrike" dirty="0">
+                        <a:effectLst/>
+                        <a:latin typeface="Montserrat" panose="00000500000000000000" pitchFamily="2" charset="0"/>
+                      </a:endParaRPr>
                     </a:p>
                   </a:txBody>
                   <a:tcPr marL="7620" marR="7620" marT="7620" marB="0" anchor="ctr">
@@ -39318,26 +38406,6 @@
                       <a:pPr algn="ctr" fontAlgn="b">
                         <a:buNone/>
                       </a:pPr>
-                      <a:r>
-                        <a:rPr lang="es-MX" sz="1000" b="1" i="0" u="none" strike="noStrike" dirty="0">
-                          <a:solidFill>
-                            <a:srgbClr val="00B050"/>
-                          </a:solidFill>
-                          <a:effectLst/>
-                          <a:latin typeface="Montserrat" panose="00000500000000000000" pitchFamily="2" charset="0"/>
-                        </a:rPr>
-                        <a:t>26.2 </a:t>
-                      </a:r>
-                      <a:r>
-                        <a:rPr lang="es-MX" sz="1000" b="1" i="0" u="none" strike="noStrike" dirty="0" err="1">
-                          <a:solidFill>
-                            <a:srgbClr val="00B050"/>
-                          </a:solidFill>
-                          <a:effectLst/>
-                          <a:latin typeface="Montserrat" panose="00000500000000000000" pitchFamily="2" charset="0"/>
-                        </a:rPr>
-                        <a:t>pp</a:t>
-                      </a:r>
                       <a:endParaRPr lang="es-MX" sz="1000" b="1" i="0" u="none" strike="noStrike" dirty="0">
                         <a:solidFill>
                           <a:srgbClr val="00B050"/>
@@ -39418,13 +38486,10 @@
                       <a:pPr algn="ctr" fontAlgn="b">
                         <a:buNone/>
                       </a:pPr>
-                      <a:r>
-                        <a:rPr lang="es-MX" sz="1000" b="0" i="0" u="none" strike="noStrike" dirty="0">
-                          <a:effectLst/>
-                          <a:latin typeface="Montserrat" panose="00000500000000000000" pitchFamily="2" charset="0"/>
-                        </a:rPr>
-                        <a:t>13</a:t>
-                      </a:r>
+                      <a:endParaRPr lang="es-MX" sz="1000" b="0" i="0" u="none" strike="noStrike" dirty="0">
+                        <a:effectLst/>
+                        <a:latin typeface="Montserrat" panose="00000500000000000000" pitchFamily="2" charset="0"/>
+                      </a:endParaRPr>
                     </a:p>
                   </a:txBody>
                   <a:tcPr marL="7620" marR="7620" marT="7620" marB="0" anchor="ctr">
@@ -39490,13 +38555,10 @@
                       <a:pPr algn="ctr" fontAlgn="b">
                         <a:buNone/>
                       </a:pPr>
-                      <a:r>
-                        <a:rPr lang="es-MX" sz="1000" b="1" i="0" u="none" strike="noStrike" dirty="0">
-                          <a:effectLst/>
-                          <a:latin typeface="Montserrat" panose="00000500000000000000" pitchFamily="2" charset="0"/>
-                        </a:rPr>
-                        <a:t>76.9%</a:t>
-                      </a:r>
+                      <a:endParaRPr lang="es-MX" sz="1000" b="1" i="0" u="none" strike="noStrike" dirty="0">
+                        <a:effectLst/>
+                        <a:latin typeface="Montserrat" panose="00000500000000000000" pitchFamily="2" charset="0"/>
+                      </a:endParaRPr>
                     </a:p>
                   </a:txBody>
                   <a:tcPr marL="7620" marR="7620" marT="7620" marB="0" anchor="ctr">
@@ -39565,13 +38627,10 @@
                       <a:pPr algn="ctr" fontAlgn="b">
                         <a:buNone/>
                       </a:pPr>
-                      <a:r>
-                        <a:rPr lang="es-MX" sz="1000" b="0" i="0" u="none" strike="noStrike" dirty="0">
-                          <a:effectLst/>
-                          <a:latin typeface="Montserrat" panose="00000500000000000000" pitchFamily="2" charset="0"/>
-                        </a:rPr>
-                        <a:t>46.2%</a:t>
-                      </a:r>
+                      <a:endParaRPr lang="es-MX" sz="1000" b="0" i="0" u="none" strike="noStrike" dirty="0">
+                        <a:effectLst/>
+                        <a:latin typeface="Montserrat" panose="00000500000000000000" pitchFamily="2" charset="0"/>
+                      </a:endParaRPr>
                     </a:p>
                   </a:txBody>
                   <a:tcPr marL="7620" marR="7620" marT="7620" marB="0" anchor="ctr">
@@ -39638,26 +38697,6 @@
                       <a:pPr algn="ctr" fontAlgn="b">
                         <a:buNone/>
                       </a:pPr>
-                      <a:r>
-                        <a:rPr lang="es-MX" sz="1000" b="0" i="0" u="none" strike="noStrike" dirty="0">
-                          <a:solidFill>
-                            <a:srgbClr val="00B050"/>
-                          </a:solidFill>
-                          <a:effectLst/>
-                          <a:latin typeface="Montserrat" panose="00000500000000000000" pitchFamily="2" charset="0"/>
-                        </a:rPr>
-                        <a:t>30.7 </a:t>
-                      </a:r>
-                      <a:r>
-                        <a:rPr lang="es-MX" sz="1000" b="0" i="0" u="none" strike="noStrike" dirty="0" err="1">
-                          <a:solidFill>
-                            <a:srgbClr val="00B050"/>
-                          </a:solidFill>
-                          <a:effectLst/>
-                          <a:latin typeface="Montserrat" panose="00000500000000000000" pitchFamily="2" charset="0"/>
-                        </a:rPr>
-                        <a:t>pp</a:t>
-                      </a:r>
                       <a:endParaRPr lang="es-MX" sz="1000" b="0" i="0" u="none" strike="noStrike" dirty="0">
                         <a:solidFill>
                           <a:srgbClr val="00B050"/>
@@ -39738,13 +38777,10 @@
                       <a:pPr algn="ctr" fontAlgn="b">
                         <a:buNone/>
                       </a:pPr>
-                      <a:r>
-                        <a:rPr lang="es-MX" sz="1000" b="0" i="0" u="none" strike="noStrike">
-                          <a:effectLst/>
-                          <a:latin typeface="Montserrat" panose="00000500000000000000" pitchFamily="2" charset="0"/>
-                        </a:rPr>
-                        <a:t>2</a:t>
-                      </a:r>
+                      <a:endParaRPr lang="es-MX" sz="1000" b="0" i="0" u="none" strike="noStrike">
+                        <a:effectLst/>
+                        <a:latin typeface="Montserrat" panose="00000500000000000000" pitchFamily="2" charset="0"/>
+                      </a:endParaRPr>
                     </a:p>
                   </a:txBody>
                   <a:tcPr marL="7620" marR="7620" marT="7620" marB="0" anchor="ctr">
@@ -39810,13 +38846,10 @@
                       <a:pPr algn="ctr" fontAlgn="b">
                         <a:buNone/>
                       </a:pPr>
-                      <a:r>
-                        <a:rPr lang="es-MX" sz="1000" b="1" i="0" u="none" strike="noStrike" dirty="0">
-                          <a:effectLst/>
-                          <a:latin typeface="Montserrat" panose="00000500000000000000" pitchFamily="2" charset="0"/>
-                        </a:rPr>
-                        <a:t>*</a:t>
-                      </a:r>
+                      <a:endParaRPr lang="es-MX" sz="1000" b="1" i="0" u="none" strike="noStrike" dirty="0">
+                        <a:effectLst/>
+                        <a:latin typeface="Montserrat" panose="00000500000000000000" pitchFamily="2" charset="0"/>
+                      </a:endParaRPr>
                     </a:p>
                   </a:txBody>
                   <a:tcPr marL="7620" marR="7620" marT="7620" marB="0" anchor="ctr">
@@ -39899,23 +38932,20 @@
                         <a:tabLst/>
                         <a:defRPr/>
                       </a:pPr>
-                      <a:r>
-                        <a:rPr kumimoji="0" lang="es-MX" sz="1000" b="0" i="0" u="none" strike="noStrike" kern="1200" cap="none" spc="0" normalizeH="0" baseline="0" noProof="0" dirty="0">
-                          <a:ln>
-                            <a:noFill/>
-                          </a:ln>
-                          <a:solidFill>
-                            <a:prstClr val="black"/>
-                          </a:solidFill>
-                          <a:effectLst/>
-                          <a:uLnTx/>
-                          <a:uFillTx/>
-                          <a:latin typeface="Montserrat" panose="00000500000000000000" pitchFamily="2" charset="0"/>
-                          <a:ea typeface="+mn-ea"/>
-                          <a:cs typeface="+mn-cs"/>
-                        </a:rPr>
-                        <a:t>-</a:t>
-                      </a:r>
+                      <a:endParaRPr kumimoji="0" lang="es-MX" sz="1000" b="0" i="0" u="none" strike="noStrike" kern="1200" cap="none" spc="0" normalizeH="0" baseline="0" noProof="0" dirty="0">
+                        <a:ln>
+                          <a:noFill/>
+                        </a:ln>
+                        <a:solidFill>
+                          <a:prstClr val="black"/>
+                        </a:solidFill>
+                        <a:effectLst/>
+                        <a:uLnTx/>
+                        <a:uFillTx/>
+                        <a:latin typeface="Montserrat" panose="00000500000000000000" pitchFamily="2" charset="0"/>
+                        <a:ea typeface="+mn-ea"/>
+                        <a:cs typeface="+mn-cs"/>
+                      </a:endParaRPr>
                     </a:p>
                   </a:txBody>
                   <a:tcPr marL="7620" marR="7620" marT="7620" marB="0" anchor="ctr">
@@ -39996,23 +39026,20 @@
                         <a:tabLst/>
                         <a:defRPr/>
                       </a:pPr>
-                      <a:r>
-                        <a:rPr kumimoji="0" lang="es-MX" sz="1000" b="0" i="0" u="none" strike="noStrike" kern="1200" cap="none" spc="0" normalizeH="0" baseline="0" noProof="0" dirty="0">
-                          <a:ln>
-                            <a:noFill/>
-                          </a:ln>
-                          <a:solidFill>
-                            <a:prstClr val="black"/>
-                          </a:solidFill>
-                          <a:effectLst/>
-                          <a:uLnTx/>
-                          <a:uFillTx/>
-                          <a:latin typeface="Montserrat" panose="00000500000000000000" pitchFamily="2" charset="0"/>
-                          <a:ea typeface="+mn-ea"/>
-                          <a:cs typeface="+mn-cs"/>
-                        </a:rPr>
-                        <a:t>-</a:t>
-                      </a:r>
+                      <a:endParaRPr kumimoji="0" lang="es-MX" sz="1000" b="0" i="0" u="none" strike="noStrike" kern="1200" cap="none" spc="0" normalizeH="0" baseline="0" noProof="0" dirty="0">
+                        <a:ln>
+                          <a:noFill/>
+                        </a:ln>
+                        <a:solidFill>
+                          <a:prstClr val="black"/>
+                        </a:solidFill>
+                        <a:effectLst/>
+                        <a:uLnTx/>
+                        <a:uFillTx/>
+                        <a:latin typeface="Montserrat" panose="00000500000000000000" pitchFamily="2" charset="0"/>
+                        <a:ea typeface="+mn-ea"/>
+                        <a:cs typeface="+mn-cs"/>
+                      </a:endParaRPr>
                     </a:p>
                   </a:txBody>
                   <a:tcPr marL="7620" marR="7620" marT="7620" marB="0" anchor="ctr">
@@ -44146,7 +43173,7 @@
           <p:nvPr>
             <p:extLst>
               <p:ext uri="{D42A27DB-BD31-4B8C-83A1-F6EECF244321}">
-                <p14:modId xmlns:p14="http://schemas.microsoft.com/office/powerpoint/2010/main" val="536529387"/>
+                <p14:modId xmlns:p14="http://schemas.microsoft.com/office/powerpoint/2010/main" val="3570181992"/>
               </p:ext>
             </p:extLst>
           </p:nvPr>
@@ -44404,18 +43431,15 @@
                       <a:pPr algn="l" fontAlgn="b">
                         <a:buNone/>
                       </a:pPr>
-                      <a:r>
-                        <a:rPr lang="es-MX" sz="1400" b="0" i="0" u="none" strike="noStrike" kern="1200" dirty="0">
-                          <a:solidFill>
-                            <a:srgbClr val="00B050"/>
-                          </a:solidFill>
-                          <a:effectLst/>
-                          <a:latin typeface="Montserrat" panose="00000500000000000000" pitchFamily="2" charset="0"/>
-                          <a:ea typeface="+mn-ea"/>
-                          <a:cs typeface="+mn-cs"/>
-                        </a:rPr>
-                        <a:t>La empresa me permite aprender y crecer</a:t>
-                      </a:r>
+                      <a:endParaRPr lang="es-MX" sz="1400" b="0" i="0" u="none" strike="noStrike" kern="1200" dirty="0">
+                        <a:solidFill>
+                          <a:srgbClr val="00B050"/>
+                        </a:solidFill>
+                        <a:effectLst/>
+                        <a:latin typeface="Montserrat" panose="00000500000000000000" pitchFamily="2" charset="0"/>
+                        <a:ea typeface="+mn-ea"/>
+                        <a:cs typeface="+mn-cs"/>
+                      </a:endParaRPr>
                     </a:p>
                   </a:txBody>
                   <a:tcPr marL="7620" marR="7620" marT="7620" marB="0" anchor="ctr">
@@ -44473,18 +43497,15 @@
                       <a:pPr marL="0" algn="ctr" defTabSz="609555" rtl="0" eaLnBrk="1" fontAlgn="b" latinLnBrk="0" hangingPunct="1">
                         <a:buNone/>
                       </a:pPr>
-                      <a:r>
-                        <a:rPr lang="es-MX" sz="1400" b="1" i="0" u="none" strike="noStrike" kern="1200" dirty="0">
-                          <a:solidFill>
-                            <a:srgbClr val="00B050"/>
-                          </a:solidFill>
-                          <a:effectLst/>
-                          <a:latin typeface="Montserrat" panose="00000500000000000000" pitchFamily="2" charset="0"/>
-                          <a:ea typeface="+mn-ea"/>
-                          <a:cs typeface="+mn-cs"/>
-                        </a:rPr>
-                        <a:t>5</a:t>
-                      </a:r>
+                      <a:endParaRPr lang="es-MX" sz="1400" b="1" i="0" u="none" strike="noStrike" kern="1200" dirty="0">
+                        <a:solidFill>
+                          <a:srgbClr val="00B050"/>
+                        </a:solidFill>
+                        <a:effectLst/>
+                        <a:latin typeface="Montserrat" panose="00000500000000000000" pitchFamily="2" charset="0"/>
+                        <a:ea typeface="+mn-ea"/>
+                        <a:cs typeface="+mn-cs"/>
+                      </a:endParaRPr>
                     </a:p>
                   </a:txBody>
                   <a:tcPr marL="7620" marR="7620" marT="7620" marB="0" anchor="ctr">
@@ -44543,20 +43564,17 @@
                       <a:pPr algn="ctr" fontAlgn="b">
                         <a:buNone/>
                       </a:pPr>
-                      <a:r>
-                        <a:rPr lang="es-MX" sz="1400" b="1" i="0" u="none" strike="noStrike" kern="1200" dirty="0">
-                          <a:solidFill>
-                            <a:schemeClr val="bg1">
-                              <a:lumMod val="65000"/>
-                            </a:schemeClr>
-                          </a:solidFill>
-                          <a:effectLst/>
-                          <a:latin typeface="Montserrat" panose="00000500000000000000" pitchFamily="2" charset="0"/>
-                          <a:ea typeface="+mn-ea"/>
-                          <a:cs typeface="+mn-cs"/>
-                        </a:rPr>
-                        <a:t>Desarrollo y crecimiento</a:t>
-                      </a:r>
+                      <a:endParaRPr lang="es-MX" sz="1400" b="1" i="0" u="none" strike="noStrike" kern="1200" dirty="0">
+                        <a:solidFill>
+                          <a:schemeClr val="bg1">
+                            <a:lumMod val="65000"/>
+                          </a:schemeClr>
+                        </a:solidFill>
+                        <a:effectLst/>
+                        <a:latin typeface="Montserrat" panose="00000500000000000000" pitchFamily="2" charset="0"/>
+                        <a:ea typeface="+mn-ea"/>
+                        <a:cs typeface="+mn-cs"/>
+                      </a:endParaRPr>
                     </a:p>
                   </a:txBody>
                   <a:tcPr marL="7620" marR="7620" marT="7620" marB="0" anchor="ctr">
@@ -44622,18 +43640,15 @@
                       <a:pPr algn="l" fontAlgn="b">
                         <a:buNone/>
                       </a:pPr>
-                      <a:r>
-                        <a:rPr lang="es-MX" sz="1400" b="0" i="0" u="none" strike="noStrike" kern="1200" dirty="0">
-                          <a:solidFill>
-                            <a:srgbClr val="00B050"/>
-                          </a:solidFill>
-                          <a:effectLst/>
-                          <a:latin typeface="Montserrat" panose="00000500000000000000" pitchFamily="2" charset="0"/>
-                          <a:ea typeface="+mn-ea"/>
-                          <a:cs typeface="+mn-cs"/>
-                        </a:rPr>
-                        <a:t>Estoy orgulloso de pertenecer al grupo /Es una buena empresa /recomendable</a:t>
-                      </a:r>
+                      <a:endParaRPr lang="es-MX" sz="1400" b="0" i="0" u="none" strike="noStrike" kern="1200" dirty="0">
+                        <a:solidFill>
+                          <a:srgbClr val="00B050"/>
+                        </a:solidFill>
+                        <a:effectLst/>
+                        <a:latin typeface="Montserrat" panose="00000500000000000000" pitchFamily="2" charset="0"/>
+                        <a:ea typeface="+mn-ea"/>
+                        <a:cs typeface="+mn-cs"/>
+                      </a:endParaRPr>
                     </a:p>
                   </a:txBody>
                   <a:tcPr marL="7620" marR="7620" marT="7620" marB="0" anchor="ctr">
@@ -44691,18 +43706,15 @@
                       <a:pPr marL="0" algn="ctr" defTabSz="609555" rtl="0" eaLnBrk="1" fontAlgn="b" latinLnBrk="0" hangingPunct="1">
                         <a:buNone/>
                       </a:pPr>
-                      <a:r>
-                        <a:rPr lang="es-MX" sz="1400" b="1" i="0" u="none" strike="noStrike" kern="1200" dirty="0">
-                          <a:solidFill>
-                            <a:srgbClr val="00B050"/>
-                          </a:solidFill>
-                          <a:effectLst/>
-                          <a:latin typeface="Montserrat" panose="00000500000000000000" pitchFamily="2" charset="0"/>
-                          <a:ea typeface="+mn-ea"/>
-                          <a:cs typeface="+mn-cs"/>
-                        </a:rPr>
-                        <a:t>3</a:t>
-                      </a:r>
+                      <a:endParaRPr lang="es-MX" sz="1400" b="1" i="0" u="none" strike="noStrike" kern="1200" dirty="0">
+                        <a:solidFill>
+                          <a:srgbClr val="00B050"/>
+                        </a:solidFill>
+                        <a:effectLst/>
+                        <a:latin typeface="Montserrat" panose="00000500000000000000" pitchFamily="2" charset="0"/>
+                        <a:ea typeface="+mn-ea"/>
+                        <a:cs typeface="+mn-cs"/>
+                      </a:endParaRPr>
                     </a:p>
                   </a:txBody>
                   <a:tcPr marL="7620" marR="7620" marT="7620" marB="0" anchor="ctr">
@@ -44761,20 +43773,17 @@
                       <a:pPr algn="ctr" fontAlgn="b">
                         <a:buNone/>
                       </a:pPr>
-                      <a:r>
-                        <a:rPr lang="es-MX" sz="1400" b="1" i="0" u="none" strike="noStrike" kern="1200" dirty="0">
-                          <a:solidFill>
-                            <a:schemeClr val="bg1">
-                              <a:lumMod val="65000"/>
-                            </a:schemeClr>
-                          </a:solidFill>
-                          <a:effectLst/>
-                          <a:latin typeface="Montserrat" panose="00000500000000000000" pitchFamily="2" charset="0"/>
-                          <a:ea typeface="+mn-ea"/>
-                          <a:cs typeface="+mn-cs"/>
-                        </a:rPr>
-                        <a:t>Imagen de la empresa</a:t>
-                      </a:r>
+                      <a:endParaRPr lang="es-MX" sz="1400" b="1" i="0" u="none" strike="noStrike" kern="1200" dirty="0">
+                        <a:solidFill>
+                          <a:schemeClr val="bg1">
+                            <a:lumMod val="65000"/>
+                          </a:schemeClr>
+                        </a:solidFill>
+                        <a:effectLst/>
+                        <a:latin typeface="Montserrat" panose="00000500000000000000" pitchFamily="2" charset="0"/>
+                        <a:ea typeface="+mn-ea"/>
+                        <a:cs typeface="+mn-cs"/>
+                      </a:endParaRPr>
                     </a:p>
                   </a:txBody>
                   <a:tcPr marL="7620" marR="7620" marT="7620" marB="0" anchor="ctr">
@@ -44840,18 +43849,15 @@
                       <a:pPr algn="l" fontAlgn="b">
                         <a:buNone/>
                       </a:pPr>
-                      <a:r>
-                        <a:rPr lang="es-MX" sz="1400" b="0" i="0" u="none" strike="noStrike" kern="1200" dirty="0">
-                          <a:solidFill>
-                            <a:srgbClr val="FF0000"/>
-                          </a:solidFill>
-                          <a:effectLst/>
-                          <a:latin typeface="Montserrat" panose="00000500000000000000" pitchFamily="2" charset="0"/>
-                          <a:ea typeface="+mn-ea"/>
-                          <a:cs typeface="+mn-cs"/>
-                        </a:rPr>
-                        <a:t>El trabajo no es para cualquier persona / debe ser apto para el puesto</a:t>
-                      </a:r>
+                      <a:endParaRPr lang="es-MX" sz="1400" b="0" i="0" u="none" strike="noStrike" kern="1200" dirty="0">
+                        <a:solidFill>
+                          <a:srgbClr val="FF0000"/>
+                        </a:solidFill>
+                        <a:effectLst/>
+                        <a:latin typeface="Montserrat" panose="00000500000000000000" pitchFamily="2" charset="0"/>
+                        <a:ea typeface="+mn-ea"/>
+                        <a:cs typeface="+mn-cs"/>
+                      </a:endParaRPr>
                     </a:p>
                   </a:txBody>
                   <a:tcPr marL="7620" marR="7620" marT="7620" marB="0" anchor="ctr">
@@ -44909,18 +43915,15 @@
                       <a:pPr marL="0" algn="ctr" defTabSz="609555" rtl="0" eaLnBrk="1" fontAlgn="b" latinLnBrk="0" hangingPunct="1">
                         <a:buNone/>
                       </a:pPr>
-                      <a:r>
-                        <a:rPr lang="es-MX" sz="1400" b="1" i="0" u="none" strike="noStrike" kern="1200" dirty="0">
-                          <a:solidFill>
-                            <a:srgbClr val="FF0000"/>
-                          </a:solidFill>
-                          <a:effectLst/>
-                          <a:latin typeface="Montserrat" panose="00000500000000000000" pitchFamily="2" charset="0"/>
-                          <a:ea typeface="+mn-ea"/>
-                          <a:cs typeface="+mn-cs"/>
-                        </a:rPr>
-                        <a:t>2</a:t>
-                      </a:r>
+                      <a:endParaRPr lang="es-MX" sz="1400" b="1" i="0" u="none" strike="noStrike" kern="1200" dirty="0">
+                        <a:solidFill>
+                          <a:srgbClr val="FF0000"/>
+                        </a:solidFill>
+                        <a:effectLst/>
+                        <a:latin typeface="Montserrat" panose="00000500000000000000" pitchFamily="2" charset="0"/>
+                        <a:ea typeface="+mn-ea"/>
+                        <a:cs typeface="+mn-cs"/>
+                      </a:endParaRPr>
                     </a:p>
                   </a:txBody>
                   <a:tcPr marL="7620" marR="7620" marT="7620" marB="0" anchor="ctr">
@@ -44979,20 +43982,17 @@
                       <a:pPr algn="ctr" fontAlgn="b">
                         <a:buNone/>
                       </a:pPr>
-                      <a:r>
-                        <a:rPr lang="es-MX" sz="1400" b="1" i="0" u="none" strike="noStrike" kern="1200" dirty="0">
-                          <a:solidFill>
-                            <a:schemeClr val="bg1">
-                              <a:lumMod val="65000"/>
-                            </a:schemeClr>
-                          </a:solidFill>
-                          <a:effectLst/>
-                          <a:latin typeface="Montserrat" panose="00000500000000000000" pitchFamily="2" charset="0"/>
-                          <a:ea typeface="+mn-ea"/>
-                          <a:cs typeface="+mn-cs"/>
-                        </a:rPr>
-                        <a:t>Liderazgo</a:t>
-                      </a:r>
+                      <a:endParaRPr lang="es-MX" sz="1400" b="1" i="0" u="none" strike="noStrike" kern="1200" dirty="0">
+                        <a:solidFill>
+                          <a:schemeClr val="bg1">
+                            <a:lumMod val="65000"/>
+                          </a:schemeClr>
+                        </a:solidFill>
+                        <a:effectLst/>
+                        <a:latin typeface="Montserrat" panose="00000500000000000000" pitchFamily="2" charset="0"/>
+                        <a:ea typeface="+mn-ea"/>
+                        <a:cs typeface="+mn-cs"/>
+                      </a:endParaRPr>
                     </a:p>
                   </a:txBody>
                   <a:tcPr marL="7620" marR="7620" marT="7620" marB="0" anchor="ctr">
@@ -45058,18 +44058,15 @@
                       <a:pPr algn="l" fontAlgn="b">
                         <a:buNone/>
                       </a:pPr>
-                      <a:r>
-                        <a:rPr lang="es-MX" sz="1400" b="0" i="0" u="none" strike="noStrike" kern="1200" dirty="0">
-                          <a:solidFill>
-                            <a:srgbClr val="00B050"/>
-                          </a:solidFill>
-                          <a:effectLst/>
-                          <a:latin typeface="Montserrat" panose="00000500000000000000" pitchFamily="2" charset="0"/>
-                          <a:ea typeface="+mn-ea"/>
-                          <a:cs typeface="+mn-cs"/>
-                        </a:rPr>
-                        <a:t>Es una empresa con valores</a:t>
-                      </a:r>
+                      <a:endParaRPr lang="es-MX" sz="1400" b="0" i="0" u="none" strike="noStrike" kern="1200" dirty="0">
+                        <a:solidFill>
+                          <a:srgbClr val="00B050"/>
+                        </a:solidFill>
+                        <a:effectLst/>
+                        <a:latin typeface="Montserrat" panose="00000500000000000000" pitchFamily="2" charset="0"/>
+                        <a:ea typeface="+mn-ea"/>
+                        <a:cs typeface="+mn-cs"/>
+                      </a:endParaRPr>
                     </a:p>
                   </a:txBody>
                   <a:tcPr marL="7620" marR="7620" marT="7620" marB="0" anchor="ctr">
@@ -45127,18 +44124,15 @@
                       <a:pPr marL="0" algn="ctr" defTabSz="609555" rtl="0" eaLnBrk="1" fontAlgn="b" latinLnBrk="0" hangingPunct="1">
                         <a:buNone/>
                       </a:pPr>
-                      <a:r>
-                        <a:rPr lang="es-MX" sz="1400" b="1" i="0" u="none" strike="noStrike" kern="1200">
-                          <a:solidFill>
-                            <a:srgbClr val="00B050"/>
-                          </a:solidFill>
-                          <a:effectLst/>
-                          <a:latin typeface="Montserrat" panose="00000500000000000000" pitchFamily="2" charset="0"/>
-                          <a:ea typeface="+mn-ea"/>
-                          <a:cs typeface="+mn-cs"/>
-                        </a:rPr>
-                        <a:t>1</a:t>
-                      </a:r>
+                      <a:endParaRPr lang="es-MX" sz="1400" b="1" i="0" u="none" strike="noStrike" kern="1200">
+                        <a:solidFill>
+                          <a:srgbClr val="00B050"/>
+                        </a:solidFill>
+                        <a:effectLst/>
+                        <a:latin typeface="Montserrat" panose="00000500000000000000" pitchFamily="2" charset="0"/>
+                        <a:ea typeface="+mn-ea"/>
+                        <a:cs typeface="+mn-cs"/>
+                      </a:endParaRPr>
                     </a:p>
                   </a:txBody>
                   <a:tcPr marL="7620" marR="7620" marT="7620" marB="0" anchor="ctr">
@@ -45197,20 +44191,17 @@
                       <a:pPr algn="ctr" fontAlgn="b">
                         <a:buNone/>
                       </a:pPr>
-                      <a:r>
-                        <a:rPr lang="es-MX" sz="1400" b="1" i="0" u="none" strike="noStrike" kern="1200" dirty="0">
-                          <a:solidFill>
-                            <a:schemeClr val="bg1">
-                              <a:lumMod val="65000"/>
-                            </a:schemeClr>
-                          </a:solidFill>
-                          <a:effectLst/>
-                          <a:latin typeface="Montserrat" panose="00000500000000000000" pitchFamily="2" charset="0"/>
-                          <a:ea typeface="+mn-ea"/>
-                          <a:cs typeface="+mn-cs"/>
-                        </a:rPr>
-                        <a:t>Imagen de la empresa</a:t>
-                      </a:r>
+                      <a:endParaRPr lang="es-MX" sz="1400" b="1" i="0" u="none" strike="noStrike" kern="1200" dirty="0">
+                        <a:solidFill>
+                          <a:schemeClr val="bg1">
+                            <a:lumMod val="65000"/>
+                          </a:schemeClr>
+                        </a:solidFill>
+                        <a:effectLst/>
+                        <a:latin typeface="Montserrat" panose="00000500000000000000" pitchFamily="2" charset="0"/>
+                        <a:ea typeface="+mn-ea"/>
+                        <a:cs typeface="+mn-cs"/>
+                      </a:endParaRPr>
                     </a:p>
                   </a:txBody>
                   <a:tcPr marL="7620" marR="7620" marT="7620" marB="0" anchor="ctr">
@@ -45276,18 +44267,15 @@
                       <a:pPr algn="l" fontAlgn="b">
                         <a:buNone/>
                       </a:pPr>
-                      <a:r>
-                        <a:rPr lang="es-MX" sz="1400" b="0" i="0" u="none" strike="noStrike" kern="1200" dirty="0">
-                          <a:solidFill>
-                            <a:srgbClr val="FF0000"/>
-                          </a:solidFill>
-                          <a:effectLst/>
-                          <a:latin typeface="Montserrat" panose="00000500000000000000" pitchFamily="2" charset="0"/>
-                          <a:ea typeface="+mn-ea"/>
-                          <a:cs typeface="+mn-cs"/>
-                        </a:rPr>
-                        <a:t>Hay favoritismo para crecer</a:t>
-                      </a:r>
+                      <a:endParaRPr lang="es-MX" sz="1400" b="0" i="0" u="none" strike="noStrike" kern="1200" dirty="0">
+                        <a:solidFill>
+                          <a:srgbClr val="FF0000"/>
+                        </a:solidFill>
+                        <a:effectLst/>
+                        <a:latin typeface="Montserrat" panose="00000500000000000000" pitchFamily="2" charset="0"/>
+                        <a:ea typeface="+mn-ea"/>
+                        <a:cs typeface="+mn-cs"/>
+                      </a:endParaRPr>
                     </a:p>
                   </a:txBody>
                   <a:tcPr marL="7620" marR="7620" marT="7620" marB="0" anchor="ctr">
@@ -45345,18 +44333,15 @@
                       <a:pPr marL="0" algn="ctr" defTabSz="609555" rtl="0" eaLnBrk="1" fontAlgn="b" latinLnBrk="0" hangingPunct="1">
                         <a:buNone/>
                       </a:pPr>
-                      <a:r>
-                        <a:rPr lang="es-MX" sz="1400" b="1" i="0" u="none" strike="noStrike" kern="1200" dirty="0">
-                          <a:solidFill>
-                            <a:srgbClr val="FF0000"/>
-                          </a:solidFill>
-                          <a:effectLst/>
-                          <a:latin typeface="Montserrat" panose="00000500000000000000" pitchFamily="2" charset="0"/>
-                          <a:ea typeface="+mn-ea"/>
-                          <a:cs typeface="+mn-cs"/>
-                        </a:rPr>
-                        <a:t>1</a:t>
-                      </a:r>
+                      <a:endParaRPr lang="es-MX" sz="1400" b="1" i="0" u="none" strike="noStrike" kern="1200" dirty="0">
+                        <a:solidFill>
+                          <a:srgbClr val="FF0000"/>
+                        </a:solidFill>
+                        <a:effectLst/>
+                        <a:latin typeface="Montserrat" panose="00000500000000000000" pitchFamily="2" charset="0"/>
+                        <a:ea typeface="+mn-ea"/>
+                        <a:cs typeface="+mn-cs"/>
+                      </a:endParaRPr>
                     </a:p>
                   </a:txBody>
                   <a:tcPr marL="7620" marR="7620" marT="7620" marB="0" anchor="ctr">
@@ -45415,20 +44400,17 @@
                       <a:pPr algn="ctr" fontAlgn="b">
                         <a:buNone/>
                       </a:pPr>
-                      <a:r>
-                        <a:rPr lang="es-MX" sz="1400" b="1" i="0" u="none" strike="noStrike" kern="1200">
-                          <a:solidFill>
-                            <a:schemeClr val="bg1">
-                              <a:lumMod val="65000"/>
-                            </a:schemeClr>
-                          </a:solidFill>
-                          <a:effectLst/>
-                          <a:latin typeface="Montserrat" panose="00000500000000000000" pitchFamily="2" charset="0"/>
-                          <a:ea typeface="+mn-ea"/>
-                          <a:cs typeface="+mn-cs"/>
-                        </a:rPr>
-                        <a:t>Desarrollo y crecimiento</a:t>
-                      </a:r>
+                      <a:endParaRPr lang="es-MX" sz="1400" b="1" i="0" u="none" strike="noStrike" kern="1200">
+                        <a:solidFill>
+                          <a:schemeClr val="bg1">
+                            <a:lumMod val="65000"/>
+                          </a:schemeClr>
+                        </a:solidFill>
+                        <a:effectLst/>
+                        <a:latin typeface="Montserrat" panose="00000500000000000000" pitchFamily="2" charset="0"/>
+                        <a:ea typeface="+mn-ea"/>
+                        <a:cs typeface="+mn-cs"/>
+                      </a:endParaRPr>
                     </a:p>
                   </a:txBody>
                   <a:tcPr marL="7620" marR="7620" marT="7620" marB="0" anchor="ctr">
@@ -45494,18 +44476,15 @@
                       <a:pPr algn="l" fontAlgn="b">
                         <a:buNone/>
                       </a:pPr>
-                      <a:r>
-                        <a:rPr lang="es-MX" sz="1400" b="0" i="0" u="none" strike="noStrike" kern="1200" dirty="0">
-                          <a:solidFill>
-                            <a:srgbClr val="00B050"/>
-                          </a:solidFill>
-                          <a:effectLst/>
-                          <a:latin typeface="Montserrat" panose="00000500000000000000" pitchFamily="2" charset="0"/>
-                          <a:ea typeface="+mn-ea"/>
-                          <a:cs typeface="+mn-cs"/>
-                        </a:rPr>
-                        <a:t>Los sueldos / salarios son puntuales</a:t>
-                      </a:r>
+                      <a:endParaRPr lang="es-MX" sz="1400" b="0" i="0" u="none" strike="noStrike" kern="1200" dirty="0">
+                        <a:solidFill>
+                          <a:srgbClr val="00B050"/>
+                        </a:solidFill>
+                        <a:effectLst/>
+                        <a:latin typeface="Montserrat" panose="00000500000000000000" pitchFamily="2" charset="0"/>
+                        <a:ea typeface="+mn-ea"/>
+                        <a:cs typeface="+mn-cs"/>
+                      </a:endParaRPr>
                     </a:p>
                   </a:txBody>
                   <a:tcPr marL="7620" marR="7620" marT="7620" marB="0" anchor="ctr">
@@ -45563,18 +44542,15 @@
                       <a:pPr marL="0" algn="ctr" defTabSz="609555" rtl="0" eaLnBrk="1" fontAlgn="b" latinLnBrk="0" hangingPunct="1">
                         <a:buNone/>
                       </a:pPr>
-                      <a:r>
-                        <a:rPr lang="es-MX" sz="1400" b="1" i="0" u="none" strike="noStrike" kern="1200" dirty="0">
-                          <a:solidFill>
-                            <a:srgbClr val="00B050"/>
-                          </a:solidFill>
-                          <a:effectLst/>
-                          <a:latin typeface="Montserrat" panose="00000500000000000000" pitchFamily="2" charset="0"/>
-                          <a:ea typeface="+mn-ea"/>
-                          <a:cs typeface="+mn-cs"/>
-                        </a:rPr>
-                        <a:t>1</a:t>
-                      </a:r>
+                      <a:endParaRPr lang="es-MX" sz="1400" b="1" i="0" u="none" strike="noStrike" kern="1200" dirty="0">
+                        <a:solidFill>
+                          <a:srgbClr val="00B050"/>
+                        </a:solidFill>
+                        <a:effectLst/>
+                        <a:latin typeface="Montserrat" panose="00000500000000000000" pitchFamily="2" charset="0"/>
+                        <a:ea typeface="+mn-ea"/>
+                        <a:cs typeface="+mn-cs"/>
+                      </a:endParaRPr>
                     </a:p>
                   </a:txBody>
                   <a:tcPr marL="7620" marR="7620" marT="7620" marB="0" anchor="ctr">
@@ -45633,20 +44609,17 @@
                       <a:pPr algn="ctr" fontAlgn="b">
                         <a:buNone/>
                       </a:pPr>
-                      <a:r>
-                        <a:rPr lang="es-MX" sz="1400" b="1" i="0" u="none" strike="noStrike" kern="1200" dirty="0">
-                          <a:solidFill>
-                            <a:schemeClr val="bg1">
-                              <a:lumMod val="65000"/>
-                            </a:schemeClr>
-                          </a:solidFill>
-                          <a:effectLst/>
-                          <a:latin typeface="Montserrat" panose="00000500000000000000" pitchFamily="2" charset="0"/>
-                          <a:ea typeface="+mn-ea"/>
-                          <a:cs typeface="+mn-cs"/>
-                        </a:rPr>
-                        <a:t>Condiciones de Trabajo</a:t>
-                      </a:r>
+                      <a:endParaRPr lang="es-MX" sz="1400" b="1" i="0" u="none" strike="noStrike" kern="1200" dirty="0">
+                        <a:solidFill>
+                          <a:schemeClr val="bg1">
+                            <a:lumMod val="65000"/>
+                          </a:schemeClr>
+                        </a:solidFill>
+                        <a:effectLst/>
+                        <a:latin typeface="Montserrat" panose="00000500000000000000" pitchFamily="2" charset="0"/>
+                        <a:ea typeface="+mn-ea"/>
+                        <a:cs typeface="+mn-cs"/>
+                      </a:endParaRPr>
                     </a:p>
                   </a:txBody>
                   <a:tcPr marL="7620" marR="7620" marT="7620" marB="0" anchor="ctr">
@@ -45712,18 +44685,15 @@
                       <a:pPr algn="l" fontAlgn="b">
                         <a:buNone/>
                       </a:pPr>
-                      <a:r>
-                        <a:rPr lang="es-MX" sz="1400" b="0" i="0" u="none" strike="noStrike" kern="1200" dirty="0">
-                          <a:solidFill>
-                            <a:srgbClr val="FF0000"/>
-                          </a:solidFill>
-                          <a:effectLst/>
-                          <a:latin typeface="Montserrat" panose="00000500000000000000" pitchFamily="2" charset="0"/>
-                          <a:ea typeface="+mn-ea"/>
-                          <a:cs typeface="+mn-cs"/>
-                        </a:rPr>
-                        <a:t>No hay suficientes prestaciones/beneficios</a:t>
-                      </a:r>
+                      <a:endParaRPr lang="es-MX" sz="1400" b="0" i="0" u="none" strike="noStrike" kern="1200" dirty="0">
+                        <a:solidFill>
+                          <a:srgbClr val="FF0000"/>
+                        </a:solidFill>
+                        <a:effectLst/>
+                        <a:latin typeface="Montserrat" panose="00000500000000000000" pitchFamily="2" charset="0"/>
+                        <a:ea typeface="+mn-ea"/>
+                        <a:cs typeface="+mn-cs"/>
+                      </a:endParaRPr>
                     </a:p>
                   </a:txBody>
                   <a:tcPr marL="7620" marR="7620" marT="7620" marB="0" anchor="ctr">
@@ -45781,18 +44751,15 @@
                       <a:pPr marL="0" algn="ctr" defTabSz="609555" rtl="0" eaLnBrk="1" fontAlgn="b" latinLnBrk="0" hangingPunct="1">
                         <a:buNone/>
                       </a:pPr>
-                      <a:r>
-                        <a:rPr lang="es-MX" sz="1400" b="1" i="0" u="none" strike="noStrike" kern="1200" dirty="0">
-                          <a:solidFill>
-                            <a:srgbClr val="FF0000"/>
-                          </a:solidFill>
-                          <a:effectLst/>
-                          <a:latin typeface="Montserrat" panose="00000500000000000000" pitchFamily="2" charset="0"/>
-                          <a:ea typeface="+mn-ea"/>
-                          <a:cs typeface="+mn-cs"/>
-                        </a:rPr>
-                        <a:t>1</a:t>
-                      </a:r>
+                      <a:endParaRPr lang="es-MX" sz="1400" b="1" i="0" u="none" strike="noStrike" kern="1200" dirty="0">
+                        <a:solidFill>
+                          <a:srgbClr val="FF0000"/>
+                        </a:solidFill>
+                        <a:effectLst/>
+                        <a:latin typeface="Montserrat" panose="00000500000000000000" pitchFamily="2" charset="0"/>
+                        <a:ea typeface="+mn-ea"/>
+                        <a:cs typeface="+mn-cs"/>
+                      </a:endParaRPr>
                     </a:p>
                   </a:txBody>
                   <a:tcPr marL="7620" marR="7620" marT="7620" marB="0" anchor="ctr">
@@ -45851,20 +44818,17 @@
                       <a:pPr algn="ctr" fontAlgn="b">
                         <a:buNone/>
                       </a:pPr>
-                      <a:r>
-                        <a:rPr lang="es-MX" sz="1400" b="1" i="0" u="none" strike="noStrike" kern="1200" dirty="0">
-                          <a:solidFill>
-                            <a:schemeClr val="bg1">
-                              <a:lumMod val="65000"/>
-                            </a:schemeClr>
-                          </a:solidFill>
-                          <a:effectLst/>
-                          <a:latin typeface="Montserrat" panose="00000500000000000000" pitchFamily="2" charset="0"/>
-                          <a:ea typeface="+mn-ea"/>
-                          <a:cs typeface="+mn-cs"/>
-                        </a:rPr>
-                        <a:t>Compensación</a:t>
-                      </a:r>
+                      <a:endParaRPr lang="es-MX" sz="1400" b="1" i="0" u="none" strike="noStrike" kern="1200" dirty="0">
+                        <a:solidFill>
+                          <a:schemeClr val="bg1">
+                            <a:lumMod val="65000"/>
+                          </a:schemeClr>
+                        </a:solidFill>
+                        <a:effectLst/>
+                        <a:latin typeface="Montserrat" panose="00000500000000000000" pitchFamily="2" charset="0"/>
+                        <a:ea typeface="+mn-ea"/>
+                        <a:cs typeface="+mn-cs"/>
+                      </a:endParaRPr>
                     </a:p>
                   </a:txBody>
                   <a:tcPr marL="7620" marR="7620" marT="7620" marB="0" anchor="ctr">
@@ -45930,18 +44894,15 @@
                       <a:pPr algn="l" fontAlgn="b">
                         <a:buNone/>
                       </a:pPr>
-                      <a:r>
-                        <a:rPr lang="es-MX" sz="1400" b="0" i="0" u="none" strike="noStrike" kern="1200" dirty="0">
-                          <a:solidFill>
-                            <a:srgbClr val="00B050"/>
-                          </a:solidFill>
-                          <a:effectLst/>
-                          <a:latin typeface="Montserrat" panose="00000500000000000000" pitchFamily="2" charset="0"/>
-                          <a:ea typeface="+mn-ea"/>
-                          <a:cs typeface="+mn-cs"/>
-                        </a:rPr>
-                        <a:t>Se trabaja en equipo / hay compañerismo / unión</a:t>
-                      </a:r>
+                      <a:endParaRPr lang="es-MX" sz="1400" b="0" i="0" u="none" strike="noStrike" kern="1200" dirty="0">
+                        <a:solidFill>
+                          <a:srgbClr val="00B050"/>
+                        </a:solidFill>
+                        <a:effectLst/>
+                        <a:latin typeface="Montserrat" panose="00000500000000000000" pitchFamily="2" charset="0"/>
+                        <a:ea typeface="+mn-ea"/>
+                        <a:cs typeface="+mn-cs"/>
+                      </a:endParaRPr>
                     </a:p>
                   </a:txBody>
                   <a:tcPr marL="7620" marR="7620" marT="7620" marB="0" anchor="ctr">
@@ -45999,18 +44960,15 @@
                       <a:pPr marL="0" algn="ctr" defTabSz="609555" rtl="0" eaLnBrk="1" fontAlgn="b" latinLnBrk="0" hangingPunct="1">
                         <a:buNone/>
                       </a:pPr>
-                      <a:r>
-                        <a:rPr lang="es-MX" sz="1400" b="1" i="0" u="none" strike="noStrike" kern="1200" dirty="0">
-                          <a:solidFill>
-                            <a:srgbClr val="00B050"/>
-                          </a:solidFill>
-                          <a:effectLst/>
-                          <a:latin typeface="Montserrat" panose="00000500000000000000" pitchFamily="2" charset="0"/>
-                          <a:ea typeface="+mn-ea"/>
-                          <a:cs typeface="+mn-cs"/>
-                        </a:rPr>
-                        <a:t>1</a:t>
-                      </a:r>
+                      <a:endParaRPr lang="es-MX" sz="1400" b="1" i="0" u="none" strike="noStrike" kern="1200" dirty="0">
+                        <a:solidFill>
+                          <a:srgbClr val="00B050"/>
+                        </a:solidFill>
+                        <a:effectLst/>
+                        <a:latin typeface="Montserrat" panose="00000500000000000000" pitchFamily="2" charset="0"/>
+                        <a:ea typeface="+mn-ea"/>
+                        <a:cs typeface="+mn-cs"/>
+                      </a:endParaRPr>
                     </a:p>
                   </a:txBody>
                   <a:tcPr marL="7620" marR="7620" marT="7620" marB="0" anchor="ctr">
@@ -46069,20 +45027,17 @@
                       <a:pPr algn="ctr" fontAlgn="b">
                         <a:buNone/>
                       </a:pPr>
-                      <a:r>
-                        <a:rPr lang="es-MX" sz="1400" b="1" i="0" u="none" strike="noStrike" kern="1200" dirty="0">
-                          <a:solidFill>
-                            <a:schemeClr val="bg1">
-                              <a:lumMod val="65000"/>
-                            </a:schemeClr>
-                          </a:solidFill>
-                          <a:effectLst/>
-                          <a:latin typeface="Montserrat" panose="00000500000000000000" pitchFamily="2" charset="0"/>
-                          <a:ea typeface="+mn-ea"/>
-                          <a:cs typeface="+mn-cs"/>
-                        </a:rPr>
-                        <a:t>Ambiente laboral</a:t>
-                      </a:r>
+                      <a:endParaRPr lang="es-MX" sz="1400" b="1" i="0" u="none" strike="noStrike" kern="1200" dirty="0">
+                        <a:solidFill>
+                          <a:schemeClr val="bg1">
+                            <a:lumMod val="65000"/>
+                          </a:schemeClr>
+                        </a:solidFill>
+                        <a:effectLst/>
+                        <a:latin typeface="Montserrat" panose="00000500000000000000" pitchFamily="2" charset="0"/>
+                        <a:ea typeface="+mn-ea"/>
+                        <a:cs typeface="+mn-cs"/>
+                      </a:endParaRPr>
                     </a:p>
                   </a:txBody>
                   <a:tcPr marL="7620" marR="7620" marT="7620" marB="0" anchor="ctr">
@@ -46148,18 +45103,15 @@
                       <a:pPr algn="l" fontAlgn="b">
                         <a:buNone/>
                       </a:pPr>
-                      <a:r>
-                        <a:rPr lang="es-MX" sz="1400" b="0" i="0" u="none" strike="noStrike" kern="1200" dirty="0">
-                          <a:solidFill>
-                            <a:srgbClr val="00B050"/>
-                          </a:solidFill>
-                          <a:effectLst/>
-                          <a:latin typeface="Montserrat" panose="00000500000000000000" pitchFamily="2" charset="0"/>
-                          <a:ea typeface="+mn-ea"/>
-                          <a:cs typeface="+mn-cs"/>
-                        </a:rPr>
-                        <a:t>Toman en cuenta mis opiniones</a:t>
-                      </a:r>
+                      <a:endParaRPr lang="es-MX" sz="1400" b="0" i="0" u="none" strike="noStrike" kern="1200" dirty="0">
+                        <a:solidFill>
+                          <a:srgbClr val="00B050"/>
+                        </a:solidFill>
+                        <a:effectLst/>
+                        <a:latin typeface="Montserrat" panose="00000500000000000000" pitchFamily="2" charset="0"/>
+                        <a:ea typeface="+mn-ea"/>
+                        <a:cs typeface="+mn-cs"/>
+                      </a:endParaRPr>
                     </a:p>
                   </a:txBody>
                   <a:tcPr marL="7620" marR="7620" marT="7620" marB="0" anchor="ctr">
@@ -46217,18 +45169,15 @@
                       <a:pPr marL="0" algn="ctr" defTabSz="609555" rtl="0" eaLnBrk="1" fontAlgn="b" latinLnBrk="0" hangingPunct="1">
                         <a:buNone/>
                       </a:pPr>
-                      <a:r>
-                        <a:rPr lang="es-MX" sz="1400" b="1" i="0" u="none" strike="noStrike" kern="1200" dirty="0">
-                          <a:solidFill>
-                            <a:srgbClr val="00B050"/>
-                          </a:solidFill>
-                          <a:effectLst/>
-                          <a:latin typeface="Montserrat" panose="00000500000000000000" pitchFamily="2" charset="0"/>
-                          <a:ea typeface="+mn-ea"/>
-                          <a:cs typeface="+mn-cs"/>
-                        </a:rPr>
-                        <a:t>1</a:t>
-                      </a:r>
+                      <a:endParaRPr lang="es-MX" sz="1400" b="1" i="0" u="none" strike="noStrike" kern="1200" dirty="0">
+                        <a:solidFill>
+                          <a:srgbClr val="00B050"/>
+                        </a:solidFill>
+                        <a:effectLst/>
+                        <a:latin typeface="Montserrat" panose="00000500000000000000" pitchFamily="2" charset="0"/>
+                        <a:ea typeface="+mn-ea"/>
+                        <a:cs typeface="+mn-cs"/>
+                      </a:endParaRPr>
                     </a:p>
                   </a:txBody>
                   <a:tcPr marL="7620" marR="7620" marT="7620" marB="0" anchor="ctr">
@@ -46287,20 +45236,17 @@
                       <a:pPr algn="ctr" fontAlgn="b">
                         <a:buNone/>
                       </a:pPr>
-                      <a:r>
-                        <a:rPr lang="es-MX" sz="1400" b="1" i="0" u="none" strike="noStrike" kern="1200" dirty="0">
-                          <a:solidFill>
-                            <a:schemeClr val="bg1">
-                              <a:lumMod val="65000"/>
-                            </a:schemeClr>
-                          </a:solidFill>
-                          <a:effectLst/>
-                          <a:latin typeface="Montserrat" panose="00000500000000000000" pitchFamily="2" charset="0"/>
-                          <a:ea typeface="+mn-ea"/>
-                          <a:cs typeface="+mn-cs"/>
-                        </a:rPr>
-                        <a:t>Comunicación</a:t>
-                      </a:r>
+                      <a:endParaRPr lang="es-MX" sz="1400" b="1" i="0" u="none" strike="noStrike" kern="1200" dirty="0">
+                        <a:solidFill>
+                          <a:schemeClr val="bg1">
+                            <a:lumMod val="65000"/>
+                          </a:schemeClr>
+                        </a:solidFill>
+                        <a:effectLst/>
+                        <a:latin typeface="Montserrat" panose="00000500000000000000" pitchFamily="2" charset="0"/>
+                        <a:ea typeface="+mn-ea"/>
+                        <a:cs typeface="+mn-cs"/>
+                      </a:endParaRPr>
                     </a:p>
                   </a:txBody>
                   <a:tcPr marL="7620" marR="7620" marT="7620" marB="0" anchor="ctr">
@@ -48049,7 +46995,7 @@
           <p:nvPr>
             <p:extLst>
               <p:ext uri="{D42A27DB-BD31-4B8C-83A1-F6EECF244321}">
-                <p14:modId xmlns:p14="http://schemas.microsoft.com/office/powerpoint/2010/main" val="3637090600"/>
+                <p14:modId xmlns:p14="http://schemas.microsoft.com/office/powerpoint/2010/main" val="2606547199"/>
               </p:ext>
             </p:extLst>
           </p:nvPr>
@@ -48307,18 +47253,15 @@
                       <a:pPr algn="l" fontAlgn="b">
                         <a:buNone/>
                       </a:pPr>
-                      <a:r>
-                        <a:rPr lang="es-MX" sz="1400" b="0" i="0" u="none" strike="noStrike" kern="1200" dirty="0">
-                          <a:solidFill>
-                            <a:srgbClr val="00B050"/>
-                          </a:solidFill>
-                          <a:effectLst/>
-                          <a:latin typeface="Montserrat" panose="00000500000000000000" pitchFamily="2" charset="0"/>
-                          <a:ea typeface="+mn-ea"/>
-                          <a:cs typeface="+mn-cs"/>
-                        </a:rPr>
-                        <a:t>Estoy orgulloso de pertenecer al grupo /Es una buena empresa /recomendable</a:t>
-                      </a:r>
+                      <a:endParaRPr lang="es-MX" sz="1400" b="0" i="0" u="none" strike="noStrike" kern="1200" dirty="0">
+                        <a:solidFill>
+                          <a:srgbClr val="00B050"/>
+                        </a:solidFill>
+                        <a:effectLst/>
+                        <a:latin typeface="Montserrat" panose="00000500000000000000" pitchFamily="2" charset="0"/>
+                        <a:ea typeface="+mn-ea"/>
+                        <a:cs typeface="+mn-cs"/>
+                      </a:endParaRPr>
                     </a:p>
                   </a:txBody>
                   <a:tcPr marL="7620" marR="7620" marT="7620" marB="0" anchor="ctr">
@@ -48376,18 +47319,15 @@
                       <a:pPr marL="0" algn="ctr" defTabSz="609555" rtl="0" eaLnBrk="1" fontAlgn="b" latinLnBrk="0" hangingPunct="1">
                         <a:buNone/>
                       </a:pPr>
-                      <a:r>
-                        <a:rPr lang="es-MX" sz="1400" b="1" i="0" u="none" strike="noStrike" kern="1200" dirty="0">
-                          <a:solidFill>
-                            <a:srgbClr val="00B050"/>
-                          </a:solidFill>
-                          <a:effectLst/>
-                          <a:latin typeface="Montserrat" panose="00000500000000000000" pitchFamily="2" charset="0"/>
-                          <a:ea typeface="+mn-ea"/>
-                          <a:cs typeface="+mn-cs"/>
-                        </a:rPr>
-                        <a:t>2</a:t>
-                      </a:r>
+                      <a:endParaRPr lang="es-MX" sz="1400" b="1" i="0" u="none" strike="noStrike" kern="1200" dirty="0">
+                        <a:solidFill>
+                          <a:srgbClr val="00B050"/>
+                        </a:solidFill>
+                        <a:effectLst/>
+                        <a:latin typeface="Montserrat" panose="00000500000000000000" pitchFamily="2" charset="0"/>
+                        <a:ea typeface="+mn-ea"/>
+                        <a:cs typeface="+mn-cs"/>
+                      </a:endParaRPr>
                     </a:p>
                   </a:txBody>
                   <a:tcPr marL="7620" marR="7620" marT="7620" marB="0" anchor="ctr">
@@ -48446,20 +47386,17 @@
                       <a:pPr algn="ctr" fontAlgn="b">
                         <a:buNone/>
                       </a:pPr>
-                      <a:r>
-                        <a:rPr lang="es-MX" sz="1400" b="1" i="0" u="none" strike="noStrike" kern="1200" dirty="0">
-                          <a:solidFill>
-                            <a:schemeClr val="bg1">
-                              <a:lumMod val="65000"/>
-                            </a:schemeClr>
-                          </a:solidFill>
-                          <a:effectLst/>
-                          <a:latin typeface="Montserrat" panose="00000500000000000000" pitchFamily="2" charset="0"/>
-                          <a:ea typeface="+mn-ea"/>
-                          <a:cs typeface="+mn-cs"/>
-                        </a:rPr>
-                        <a:t>Imagen de la empresa</a:t>
-                      </a:r>
+                      <a:endParaRPr lang="es-MX" sz="1400" b="1" i="0" u="none" strike="noStrike" kern="1200" dirty="0">
+                        <a:solidFill>
+                          <a:schemeClr val="bg1">
+                            <a:lumMod val="65000"/>
+                          </a:schemeClr>
+                        </a:solidFill>
+                        <a:effectLst/>
+                        <a:latin typeface="Montserrat" panose="00000500000000000000" pitchFamily="2" charset="0"/>
+                        <a:ea typeface="+mn-ea"/>
+                        <a:cs typeface="+mn-cs"/>
+                      </a:endParaRPr>
                     </a:p>
                   </a:txBody>
                   <a:tcPr marL="7620" marR="7620" marT="7620" marB="0" anchor="ctr">
@@ -48525,18 +47462,15 @@
                       <a:pPr algn="l" fontAlgn="b">
                         <a:buNone/>
                       </a:pPr>
-                      <a:r>
-                        <a:rPr lang="es-MX" sz="1400" b="0" i="0" u="none" strike="noStrike" kern="1200" dirty="0">
-                          <a:solidFill>
-                            <a:srgbClr val="00B050"/>
-                          </a:solidFill>
-                          <a:effectLst/>
-                          <a:latin typeface="Montserrat" panose="00000500000000000000" pitchFamily="2" charset="0"/>
-                          <a:ea typeface="+mn-ea"/>
-                          <a:cs typeface="+mn-cs"/>
-                        </a:rPr>
-                        <a:t>Es una empresa con valores</a:t>
-                      </a:r>
+                      <a:endParaRPr lang="es-MX" sz="1400" b="0" i="0" u="none" strike="noStrike" kern="1200" dirty="0">
+                        <a:solidFill>
+                          <a:srgbClr val="00B050"/>
+                        </a:solidFill>
+                        <a:effectLst/>
+                        <a:latin typeface="Montserrat" panose="00000500000000000000" pitchFamily="2" charset="0"/>
+                        <a:ea typeface="+mn-ea"/>
+                        <a:cs typeface="+mn-cs"/>
+                      </a:endParaRPr>
                     </a:p>
                   </a:txBody>
                   <a:tcPr marL="7620" marR="7620" marT="7620" marB="0" anchor="ctr">
@@ -48594,18 +47528,15 @@
                       <a:pPr marL="0" algn="ctr" defTabSz="609555" rtl="0" eaLnBrk="1" fontAlgn="b" latinLnBrk="0" hangingPunct="1">
                         <a:buNone/>
                       </a:pPr>
-                      <a:r>
-                        <a:rPr lang="es-MX" sz="1400" b="1" i="0" u="none" strike="noStrike" kern="1200" dirty="0">
-                          <a:solidFill>
-                            <a:srgbClr val="00B050"/>
-                          </a:solidFill>
-                          <a:effectLst/>
-                          <a:latin typeface="Montserrat" panose="00000500000000000000" pitchFamily="2" charset="0"/>
-                          <a:ea typeface="+mn-ea"/>
-                          <a:cs typeface="+mn-cs"/>
-                        </a:rPr>
-                        <a:t>1</a:t>
-                      </a:r>
+                      <a:endParaRPr lang="es-MX" sz="1400" b="1" i="0" u="none" strike="noStrike" kern="1200" dirty="0">
+                        <a:solidFill>
+                          <a:srgbClr val="00B050"/>
+                        </a:solidFill>
+                        <a:effectLst/>
+                        <a:latin typeface="Montserrat" panose="00000500000000000000" pitchFamily="2" charset="0"/>
+                        <a:ea typeface="+mn-ea"/>
+                        <a:cs typeface="+mn-cs"/>
+                      </a:endParaRPr>
                     </a:p>
                   </a:txBody>
                   <a:tcPr marL="7620" marR="7620" marT="7620" marB="0" anchor="ctr">
@@ -48664,20 +47595,17 @@
                       <a:pPr algn="ctr" fontAlgn="b">
                         <a:buNone/>
                       </a:pPr>
-                      <a:r>
-                        <a:rPr lang="es-MX" sz="1400" b="1" i="0" u="none" strike="noStrike" kern="1200" dirty="0">
-                          <a:solidFill>
-                            <a:schemeClr val="bg1">
-                              <a:lumMod val="65000"/>
-                            </a:schemeClr>
-                          </a:solidFill>
-                          <a:effectLst/>
-                          <a:latin typeface="Montserrat" panose="00000500000000000000" pitchFamily="2" charset="0"/>
-                          <a:ea typeface="+mn-ea"/>
-                          <a:cs typeface="+mn-cs"/>
-                        </a:rPr>
-                        <a:t>Imagen de la empresa</a:t>
-                      </a:r>
+                      <a:endParaRPr lang="es-MX" sz="1400" b="1" i="0" u="none" strike="noStrike" kern="1200" dirty="0">
+                        <a:solidFill>
+                          <a:schemeClr val="bg1">
+                            <a:lumMod val="65000"/>
+                          </a:schemeClr>
+                        </a:solidFill>
+                        <a:effectLst/>
+                        <a:latin typeface="Montserrat" panose="00000500000000000000" pitchFamily="2" charset="0"/>
+                        <a:ea typeface="+mn-ea"/>
+                        <a:cs typeface="+mn-cs"/>
+                      </a:endParaRPr>
                     </a:p>
                   </a:txBody>
                   <a:tcPr marL="7620" marR="7620" marT="7620" marB="0" anchor="ctr">
@@ -48743,18 +47671,15 @@
                       <a:pPr algn="l" fontAlgn="b">
                         <a:buNone/>
                       </a:pPr>
-                      <a:r>
-                        <a:rPr lang="es-MX" sz="1400" b="0" i="0" u="none" strike="noStrike" kern="1200" dirty="0">
-                          <a:solidFill>
-                            <a:srgbClr val="FF0000"/>
-                          </a:solidFill>
-                          <a:effectLst/>
-                          <a:latin typeface="Montserrat" panose="00000500000000000000" pitchFamily="2" charset="0"/>
-                          <a:ea typeface="+mn-ea"/>
-                          <a:cs typeface="+mn-cs"/>
-                        </a:rPr>
-                        <a:t>Los líderes tienen mala actitud</a:t>
-                      </a:r>
+                      <a:endParaRPr lang="es-MX" sz="1400" b="0" i="0" u="none" strike="noStrike" kern="1200" dirty="0">
+                        <a:solidFill>
+                          <a:srgbClr val="FF0000"/>
+                        </a:solidFill>
+                        <a:effectLst/>
+                        <a:latin typeface="Montserrat" panose="00000500000000000000" pitchFamily="2" charset="0"/>
+                        <a:ea typeface="+mn-ea"/>
+                        <a:cs typeface="+mn-cs"/>
+                      </a:endParaRPr>
                     </a:p>
                   </a:txBody>
                   <a:tcPr marL="7620" marR="7620" marT="7620" marB="0" anchor="ctr">
@@ -48812,18 +47737,15 @@
                       <a:pPr marL="0" algn="ctr" defTabSz="609555" rtl="0" eaLnBrk="1" fontAlgn="b" latinLnBrk="0" hangingPunct="1">
                         <a:buNone/>
                       </a:pPr>
-                      <a:r>
-                        <a:rPr lang="es-MX" sz="1400" b="1" i="0" u="none" strike="noStrike" kern="1200" dirty="0">
-                          <a:solidFill>
-                            <a:srgbClr val="FF0000"/>
-                          </a:solidFill>
-                          <a:effectLst/>
-                          <a:latin typeface="Montserrat" panose="00000500000000000000" pitchFamily="2" charset="0"/>
-                          <a:ea typeface="+mn-ea"/>
-                          <a:cs typeface="+mn-cs"/>
-                        </a:rPr>
-                        <a:t>1</a:t>
-                      </a:r>
+                      <a:endParaRPr lang="es-MX" sz="1400" b="1" i="0" u="none" strike="noStrike" kern="1200" dirty="0">
+                        <a:solidFill>
+                          <a:srgbClr val="FF0000"/>
+                        </a:solidFill>
+                        <a:effectLst/>
+                        <a:latin typeface="Montserrat" panose="00000500000000000000" pitchFamily="2" charset="0"/>
+                        <a:ea typeface="+mn-ea"/>
+                        <a:cs typeface="+mn-cs"/>
+                      </a:endParaRPr>
                     </a:p>
                   </a:txBody>
                   <a:tcPr marL="7620" marR="7620" marT="7620" marB="0" anchor="ctr">
@@ -48882,20 +47804,17 @@
                       <a:pPr algn="ctr" fontAlgn="b">
                         <a:buNone/>
                       </a:pPr>
-                      <a:r>
-                        <a:rPr lang="es-MX" sz="1400" b="1" i="0" u="none" strike="noStrike" kern="1200" dirty="0">
-                          <a:solidFill>
-                            <a:schemeClr val="bg1">
-                              <a:lumMod val="65000"/>
-                            </a:schemeClr>
-                          </a:solidFill>
-                          <a:effectLst/>
-                          <a:latin typeface="Montserrat" panose="00000500000000000000" pitchFamily="2" charset="0"/>
-                          <a:ea typeface="+mn-ea"/>
-                          <a:cs typeface="+mn-cs"/>
-                        </a:rPr>
-                        <a:t>Liderazgo</a:t>
-                      </a:r>
+                      <a:endParaRPr lang="es-MX" sz="1400" b="1" i="0" u="none" strike="noStrike" kern="1200" dirty="0">
+                        <a:solidFill>
+                          <a:schemeClr val="bg1">
+                            <a:lumMod val="65000"/>
+                          </a:schemeClr>
+                        </a:solidFill>
+                        <a:effectLst/>
+                        <a:latin typeface="Montserrat" panose="00000500000000000000" pitchFamily="2" charset="0"/>
+                        <a:ea typeface="+mn-ea"/>
+                        <a:cs typeface="+mn-cs"/>
+                      </a:endParaRPr>
                     </a:p>
                   </a:txBody>
                   <a:tcPr marL="7620" marR="7620" marT="7620" marB="0" anchor="ctr">
